--- a/SUNUM_Otel_Rezervasyon.pptx
+++ b/SUNUM_Otel_Rezervasyon.pptx
@@ -14,9 +14,11 @@
     <p:sldId id="262" r:id="rId8"/>
     <p:sldId id="263" r:id="rId9"/>
     <p:sldId id="264" r:id="rId10"/>
+    <p:sldId id="265" r:id="rId11"/>
+    <p:sldId id="266" r:id="rId12"/>
   </p:sldIdLst>
   <p:notesMasterIdLst>
-    <p:notesMasterId r:id="rId11"/>
+    <p:notesMasterId r:id="rId13"/>
   </p:notesMasterIdLst>
   <p:sldSz cx="12192000" cy="6858000"/>
   <p:notesSz cx="6858000" cy="12192000"/>
@@ -552,6 +554,182 @@
 </p:notes>
 </file>
 
+<file path=ppt/notesSlides/notesSlide10.xml><?xml version="1.0" encoding="utf-8"?>
+<p:notes xmlns:a="http://schemas.openxmlformats.org/drawingml/2006/main" xmlns:r="http://schemas.openxmlformats.org/officeDocument/2006/relationships" xmlns:p="http://schemas.openxmlformats.org/presentationml/2006/main">
+  <p:cSld>
+    <p:spTree>
+      <p:nvGrpSpPr>
+        <p:cNvPr id="1" name=""/>
+        <p:cNvGrpSpPr/>
+        <p:nvPr/>
+      </p:nvGrpSpPr>
+      <p:grpSpPr>
+        <a:xfrm>
+          <a:off x="0" y="0"/>
+          <a:ext cx="0" cy="0"/>
+          <a:chOff x="0" y="0"/>
+          <a:chExt cx="0" cy="0"/>
+        </a:xfrm>
+      </p:grpSpPr>
+      <p:sp>
+        <p:nvSpPr>
+          <p:cNvPr id="2" name="Slide Image Placeholder 1"/>
+          <p:cNvSpPr>
+            <a:spLocks noGrp="1" noRot="1" noChangeAspect="1"/>
+          </p:cNvSpPr>
+          <p:nvPr>
+            <p:ph type="sldImg"/>
+          </p:nvPr>
+        </p:nvSpPr>
+        <p:spPr/>
+      </p:sp>
+      <p:sp>
+        <p:nvSpPr>
+          <p:cNvPr id="3" name="Notes Placeholder 2"/>
+          <p:cNvSpPr>
+            <a:spLocks noGrp="1"/>
+          </p:cNvSpPr>
+          <p:nvPr>
+            <p:ph type="body" idx="1"/>
+          </p:nvPr>
+        </p:nvSpPr>
+        <p:spPr/>
+        <p:txBody>
+          <a:bodyPr/>
+          <a:lstStyle/>
+          <a:p>
+            <a:r>
+              <a:rPr lang="en-US" dirty="0"/>
+              <a:t>Bu projede ogrendiklerim: katmanli REST API, JWT guvenlik, Solr ile arama, Angular ile modern on yuz ve bulut deploy.</a:t>
+            </a:r>
+            <a:endParaRPr lang="en-US" dirty="0"/>
+          </a:p>
+        </p:txBody>
+      </p:sp>
+      <p:sp>
+        <p:nvSpPr>
+          <p:cNvPr id="4" name="Slide Number Placeholder 3"/>
+          <p:cNvSpPr>
+            <a:spLocks noGrp="1"/>
+          </p:cNvSpPr>
+          <p:nvPr>
+            <p:ph type="sldNum" sz="quarter" idx="10"/>
+          </p:nvPr>
+        </p:nvSpPr>
+        <p:spPr/>
+        <p:txBody>
+          <a:bodyPr/>
+          <a:lstStyle/>
+          <a:p>
+            <a:fld id="{F7021451-1387-4CA6-816F-3879F97B5CBC}" type="slidenum">
+              <a:rPr lang="en-US"/>
+              <a:t>10</a:t>
+            </a:fld>
+            <a:endParaRPr lang="en-US"/>
+          </a:p>
+        </p:txBody>
+      </p:sp>
+    </p:spTree>
+    <p:extLst>
+      <p:ext uri="{BB962C8B-B14F-4D97-AF65-F5344CB8AC3E}">
+        <p14:creationId xmlns:p14="http://schemas.microsoft.com/office/powerpoint/2010/main" val="1024086991"/>
+      </p:ext>
+    </p:extLst>
+  </p:cSld>
+  <p:clrMapOvr>
+    <a:masterClrMapping/>
+  </p:clrMapOvr>
+</p:notes>
+</file>
+
+<file path=ppt/notesSlides/notesSlide11.xml><?xml version="1.0" encoding="utf-8"?>
+<p:notes xmlns:a="http://schemas.openxmlformats.org/drawingml/2006/main" xmlns:r="http://schemas.openxmlformats.org/officeDocument/2006/relationships" xmlns:p="http://schemas.openxmlformats.org/presentationml/2006/main">
+  <p:cSld>
+    <p:spTree>
+      <p:nvGrpSpPr>
+        <p:cNvPr id="1" name=""/>
+        <p:cNvGrpSpPr/>
+        <p:nvPr/>
+      </p:nvGrpSpPr>
+      <p:grpSpPr>
+        <a:xfrm>
+          <a:off x="0" y="0"/>
+          <a:ext cx="0" cy="0"/>
+          <a:chOff x="0" y="0"/>
+          <a:chExt cx="0" cy="0"/>
+        </a:xfrm>
+      </p:grpSpPr>
+      <p:sp>
+        <p:nvSpPr>
+          <p:cNvPr id="2" name="Slide Image Placeholder 1"/>
+          <p:cNvSpPr>
+            <a:spLocks noGrp="1" noRot="1" noChangeAspect="1"/>
+          </p:cNvSpPr>
+          <p:nvPr>
+            <p:ph type="sldImg"/>
+          </p:nvPr>
+        </p:nvSpPr>
+        <p:spPr/>
+      </p:sp>
+      <p:sp>
+        <p:nvSpPr>
+          <p:cNvPr id="3" name="Notes Placeholder 2"/>
+          <p:cNvSpPr>
+            <a:spLocks noGrp="1"/>
+          </p:cNvSpPr>
+          <p:nvPr>
+            <p:ph type="body" idx="1"/>
+          </p:nvPr>
+        </p:nvSpPr>
+        <p:spPr/>
+        <p:txBody>
+          <a:bodyPr/>
+          <a:lstStyle/>
+          <a:p>
+            <a:r>
+              <a:rPr lang="en-US" dirty="0"/>
+              <a:t>Ozet: on yuzden arama motoruna kadar her katmani iceren, canliya alinmis gercek bir uygulama. Link ekranda. Tesekkurler, sorulari alabilirim.</a:t>
+            </a:r>
+            <a:endParaRPr lang="en-US" dirty="0"/>
+          </a:p>
+        </p:txBody>
+      </p:sp>
+      <p:sp>
+        <p:nvSpPr>
+          <p:cNvPr id="4" name="Slide Number Placeholder 3"/>
+          <p:cNvSpPr>
+            <a:spLocks noGrp="1"/>
+          </p:cNvSpPr>
+          <p:nvPr>
+            <p:ph type="sldNum" sz="quarter" idx="10"/>
+          </p:nvPr>
+        </p:nvSpPr>
+        <p:spPr/>
+        <p:txBody>
+          <a:bodyPr/>
+          <a:lstStyle/>
+          <a:p>
+            <a:fld id="{F7021451-1387-4CA6-816F-3879F97B5CBC}" type="slidenum">
+              <a:rPr lang="en-US"/>
+              <a:t>11</a:t>
+            </a:fld>
+            <a:endParaRPr lang="en-US"/>
+          </a:p>
+        </p:txBody>
+      </p:sp>
+    </p:spTree>
+    <p:extLst>
+      <p:ext uri="{BB962C8B-B14F-4D97-AF65-F5344CB8AC3E}">
+        <p14:creationId xmlns:p14="http://schemas.microsoft.com/office/powerpoint/2010/main" val="1024086991"/>
+      </p:ext>
+    </p:extLst>
+  </p:cSld>
+  <p:clrMapOvr>
+    <a:masterClrMapping/>
+  </p:clrMapOvr>
+</p:notes>
+</file>
+
 <file path=ppt/notesSlides/notesSlide2.xml><?xml version="1.0" encoding="utf-8"?>
 <p:notes xmlns:a="http://schemas.openxmlformats.org/drawingml/2006/main" xmlns:r="http://schemas.openxmlformats.org/officeDocument/2006/relationships" xmlns:p="http://schemas.openxmlformats.org/presentationml/2006/main">
   <p:cSld>
@@ -1126,7 +1304,7 @@
           <a:p>
             <a:r>
               <a:rPr lang="en-US" dirty="0"/>
-              <a:t>Bu projede ogrendiklerim: katmanli REST API, JWT guvenlik, Solr ile arama, Angular ile modern on yuz ve bulut deploy.</a:t>
+              <a:t>Fiyat filtresi eklerken fark ettim ki karttaki fiyat ile odalarin fiyati tutmuyordu. En ucuz oda fiyatini tek kaynak yaptim; artik her yer tutarli. Filtre Solr range sorgusuyla sunucu tarafinda.</a:t>
             </a:r>
             <a:endParaRPr lang="en-US" dirty="0"/>
           </a:p>
@@ -1214,7 +1392,7 @@
           <a:p>
             <a:r>
               <a:rPr lang="en-US" dirty="0"/>
-              <a:t>Ozet: on yuzden arama motoruna kadar her katmani iceren gercek bir uygulama. Tesekkurler, sorulari alabilirim.</a:t>
+              <a:t>Guvenlikte temel sertlestirme: BCrypt, JWT, e-posta normalize, sifre gucu. En sevdigim kisim: arama indeksi turev veri; kaybolsa bile sistem veritabanindan kendini onariyor. Arizayi normal kabul edip tasarladim.</a:t>
             </a:r>
             <a:endParaRPr lang="en-US" dirty="0"/>
           </a:p>
@@ -1814,6 +1992,1165 @@
 </p:sld>
 </file>
 
+<file path=ppt/slides/slide10.xml><?xml version="1.0" encoding="utf-8"?>
+<p:sld xmlns:a="http://schemas.openxmlformats.org/drawingml/2006/main" xmlns:r="http://schemas.openxmlformats.org/officeDocument/2006/relationships" xmlns:p="http://schemas.openxmlformats.org/presentationml/2006/main">
+  <p:cSld name="Slide 10">
+    <p:bg>
+      <p:bgPr>
+        <a:solidFill>
+          <a:srgbClr val="FFFFFF"/>
+        </a:solidFill>
+      </p:bgPr>
+    </p:bg>
+    <p:spTree>
+      <p:nvGrpSpPr>
+        <p:cNvPr id="1" name=""/>
+        <p:cNvGrpSpPr/>
+        <p:nvPr/>
+      </p:nvGrpSpPr>
+      <p:grpSpPr>
+        <a:xfrm>
+          <a:off x="0" y="0"/>
+          <a:ext cx="0" cy="0"/>
+          <a:chOff x="0" y="0"/>
+          <a:chExt cx="0" cy="0"/>
+        </a:xfrm>
+      </p:grpSpPr>
+      <p:sp>
+        <p:nvSpPr>
+          <p:cNvPr id="2" name="Text 0"/>
+          <p:cNvSpPr/>
+          <p:nvPr/>
+        </p:nvSpPr>
+        <p:spPr>
+          <a:xfrm>
+            <a:off x="731520" y="502920"/>
+            <a:ext cx="10515600" cy="731520"/>
+          </a:xfrm>
+          <a:prstGeom prst="rect">
+            <a:avLst/>
+          </a:prstGeom>
+          <a:noFill/>
+          <a:ln/>
+        </p:spPr>
+        <p:txBody>
+          <a:bodyPr wrap="square" lIns="0" tIns="0" rIns="0" bIns="0" rtlCol="0" anchor="ctr"/>
+          <a:lstStyle/>
+          <a:p>
+            <a:pPr indent="0" marL="0">
+              <a:buNone/>
+            </a:pPr>
+            <a:r>
+              <a:rPr lang="en-US" sz="3400" b="1" dirty="0">
+                <a:solidFill>
+                  <a:srgbClr val="1B2430"/>
+                </a:solidFill>
+                <a:latin typeface="Cambria" pitchFamily="34" charset="0"/>
+                <a:ea typeface="Cambria" pitchFamily="34" charset="-122"/>
+                <a:cs typeface="Cambria" pitchFamily="34" charset="-120"/>
+              </a:rPr>
+              <a:t>Teknik olarak ogrendiklerim</a:t>
+            </a:r>
+            <a:endParaRPr lang="en-US" sz="3400" dirty="0"/>
+          </a:p>
+        </p:txBody>
+      </p:sp>
+      <p:sp>
+        <p:nvSpPr>
+          <p:cNvPr id="3" name="Shape 1"/>
+          <p:cNvSpPr/>
+          <p:nvPr/>
+        </p:nvSpPr>
+        <p:spPr>
+          <a:xfrm>
+            <a:off x="731520" y="1600200"/>
+            <a:ext cx="10698480" cy="841248"/>
+          </a:xfrm>
+          <a:prstGeom prst="roundRect">
+            <a:avLst>
+              <a:gd name="adj" fmla="val 10870"/>
+            </a:avLst>
+          </a:prstGeom>
+          <a:solidFill>
+            <a:srgbClr val="F4F8FB"/>
+          </a:solidFill>
+          <a:ln/>
+        </p:spPr>
+      </p:sp>
+      <p:sp>
+        <p:nvSpPr>
+          <p:cNvPr id="4" name="Shape 2"/>
+          <p:cNvSpPr/>
+          <p:nvPr/>
+        </p:nvSpPr>
+        <p:spPr>
+          <a:xfrm>
+            <a:off x="960120" y="1773936"/>
+            <a:ext cx="502920" cy="502920"/>
+          </a:xfrm>
+          <a:prstGeom prst="ellipse">
+            <a:avLst/>
+          </a:prstGeom>
+          <a:solidFill>
+            <a:srgbClr val="065A82"/>
+          </a:solidFill>
+          <a:ln/>
+        </p:spPr>
+      </p:sp>
+      <p:sp>
+        <p:nvSpPr>
+          <p:cNvPr id="5" name="Text 3"/>
+          <p:cNvSpPr/>
+          <p:nvPr/>
+        </p:nvSpPr>
+        <p:spPr>
+          <a:xfrm>
+            <a:off x="960120" y="1773936"/>
+            <a:ext cx="502920" cy="502920"/>
+          </a:xfrm>
+          <a:prstGeom prst="rect">
+            <a:avLst/>
+          </a:prstGeom>
+          <a:noFill/>
+          <a:ln/>
+        </p:spPr>
+        <p:txBody>
+          <a:bodyPr wrap="square" lIns="0" tIns="0" rIns="0" bIns="0" rtlCol="0" anchor="ctr"/>
+          <a:lstStyle/>
+          <a:p>
+            <a:pPr algn="ctr" indent="0" marL="0">
+              <a:buNone/>
+            </a:pPr>
+            <a:r>
+              <a:rPr lang="en-US" sz="1500" b="1" dirty="0">
+                <a:solidFill>
+                  <a:srgbClr val="FFFFFF"/>
+                </a:solidFill>
+                <a:latin typeface="Calibri" pitchFamily="34" charset="0"/>
+                <a:ea typeface="Calibri" pitchFamily="34" charset="-122"/>
+                <a:cs typeface="Calibri" pitchFamily="34" charset="-120"/>
+              </a:rPr>
+              <a:t>✓</a:t>
+            </a:r>
+            <a:endParaRPr lang="en-US" sz="1500" dirty="0"/>
+          </a:p>
+        </p:txBody>
+      </p:sp>
+      <p:sp>
+        <p:nvSpPr>
+          <p:cNvPr id="6" name="Text 4"/>
+          <p:cNvSpPr/>
+          <p:nvPr/>
+        </p:nvSpPr>
+        <p:spPr>
+          <a:xfrm>
+            <a:off x="1691640" y="1719072"/>
+            <a:ext cx="3657600" cy="548640"/>
+          </a:xfrm>
+          <a:prstGeom prst="rect">
+            <a:avLst/>
+          </a:prstGeom>
+          <a:noFill/>
+          <a:ln/>
+        </p:spPr>
+        <p:txBody>
+          <a:bodyPr wrap="square" lIns="0" tIns="0" rIns="0" bIns="0" rtlCol="0" anchor="ctr"/>
+          <a:lstStyle/>
+          <a:p>
+            <a:pPr indent="0" marL="0">
+              <a:buNone/>
+            </a:pPr>
+            <a:r>
+              <a:rPr lang="en-US" sz="1700" b="1" dirty="0">
+                <a:solidFill>
+                  <a:srgbClr val="1B2430"/>
+                </a:solidFill>
+                <a:latin typeface="Calibri" pitchFamily="34" charset="0"/>
+                <a:ea typeface="Calibri" pitchFamily="34" charset="-122"/>
+                <a:cs typeface="Calibri" pitchFamily="34" charset="-120"/>
+              </a:rPr>
+              <a:t>REST API tasarimi</a:t>
+            </a:r>
+            <a:endParaRPr lang="en-US" sz="1700" dirty="0"/>
+          </a:p>
+        </p:txBody>
+      </p:sp>
+      <p:sp>
+        <p:nvSpPr>
+          <p:cNvPr id="7" name="Text 5"/>
+          <p:cNvSpPr/>
+          <p:nvPr/>
+        </p:nvSpPr>
+        <p:spPr>
+          <a:xfrm>
+            <a:off x="5394960" y="1719072"/>
+            <a:ext cx="5852160" cy="548640"/>
+          </a:xfrm>
+          <a:prstGeom prst="rect">
+            <a:avLst/>
+          </a:prstGeom>
+          <a:noFill/>
+          <a:ln/>
+        </p:spPr>
+        <p:txBody>
+          <a:bodyPr wrap="square" lIns="0" tIns="0" rIns="0" bIns="0" rtlCol="0" anchor="ctr"/>
+          <a:lstStyle/>
+          <a:p>
+            <a:pPr indent="0" marL="0">
+              <a:buNone/>
+            </a:pPr>
+            <a:r>
+              <a:rPr lang="en-US" sz="1350" dirty="0">
+                <a:solidFill>
+                  <a:srgbClr val="5B6B7B"/>
+                </a:solidFill>
+                <a:latin typeface="Calibri" pitchFamily="34" charset="0"/>
+                <a:ea typeface="Calibri" pitchFamily="34" charset="-122"/>
+                <a:cs typeface="Calibri" pitchFamily="34" charset="-120"/>
+              </a:rPr>
+              <a:t>Controller / Service / Repository katmanlari ile temiz mimari.</a:t>
+            </a:r>
+            <a:endParaRPr lang="en-US" sz="1350" dirty="0"/>
+          </a:p>
+        </p:txBody>
+      </p:sp>
+      <p:sp>
+        <p:nvSpPr>
+          <p:cNvPr id="8" name="Shape 6"/>
+          <p:cNvSpPr/>
+          <p:nvPr/>
+        </p:nvSpPr>
+        <p:spPr>
+          <a:xfrm>
+            <a:off x="731520" y="2560320"/>
+            <a:ext cx="10698480" cy="841248"/>
+          </a:xfrm>
+          <a:prstGeom prst="roundRect">
+            <a:avLst>
+              <a:gd name="adj" fmla="val 10870"/>
+            </a:avLst>
+          </a:prstGeom>
+          <a:solidFill>
+            <a:srgbClr val="F4F8FB"/>
+          </a:solidFill>
+          <a:ln/>
+        </p:spPr>
+      </p:sp>
+      <p:sp>
+        <p:nvSpPr>
+          <p:cNvPr id="9" name="Shape 7"/>
+          <p:cNvSpPr/>
+          <p:nvPr/>
+        </p:nvSpPr>
+        <p:spPr>
+          <a:xfrm>
+            <a:off x="960120" y="2734056"/>
+            <a:ext cx="502920" cy="502920"/>
+          </a:xfrm>
+          <a:prstGeom prst="ellipse">
+            <a:avLst/>
+          </a:prstGeom>
+          <a:solidFill>
+            <a:srgbClr val="1C7293"/>
+          </a:solidFill>
+          <a:ln/>
+        </p:spPr>
+      </p:sp>
+      <p:sp>
+        <p:nvSpPr>
+          <p:cNvPr id="10" name="Text 8"/>
+          <p:cNvSpPr/>
+          <p:nvPr/>
+        </p:nvSpPr>
+        <p:spPr>
+          <a:xfrm>
+            <a:off x="960120" y="2734056"/>
+            <a:ext cx="502920" cy="502920"/>
+          </a:xfrm>
+          <a:prstGeom prst="rect">
+            <a:avLst/>
+          </a:prstGeom>
+          <a:noFill/>
+          <a:ln/>
+        </p:spPr>
+        <p:txBody>
+          <a:bodyPr wrap="square" lIns="0" tIns="0" rIns="0" bIns="0" rtlCol="0" anchor="ctr"/>
+          <a:lstStyle/>
+          <a:p>
+            <a:pPr algn="ctr" indent="0" marL="0">
+              <a:buNone/>
+            </a:pPr>
+            <a:r>
+              <a:rPr lang="en-US" sz="1500" b="1" dirty="0">
+                <a:solidFill>
+                  <a:srgbClr val="FFFFFF"/>
+                </a:solidFill>
+                <a:latin typeface="Calibri" pitchFamily="34" charset="0"/>
+                <a:ea typeface="Calibri" pitchFamily="34" charset="-122"/>
+                <a:cs typeface="Calibri" pitchFamily="34" charset="-120"/>
+              </a:rPr>
+              <a:t>✓</a:t>
+            </a:r>
+            <a:endParaRPr lang="en-US" sz="1500" dirty="0"/>
+          </a:p>
+        </p:txBody>
+      </p:sp>
+      <p:sp>
+        <p:nvSpPr>
+          <p:cNvPr id="11" name="Text 9"/>
+          <p:cNvSpPr/>
+          <p:nvPr/>
+        </p:nvSpPr>
+        <p:spPr>
+          <a:xfrm>
+            <a:off x="1691640" y="2679192"/>
+            <a:ext cx="3657600" cy="548640"/>
+          </a:xfrm>
+          <a:prstGeom prst="rect">
+            <a:avLst/>
+          </a:prstGeom>
+          <a:noFill/>
+          <a:ln/>
+        </p:spPr>
+        <p:txBody>
+          <a:bodyPr wrap="square" lIns="0" tIns="0" rIns="0" bIns="0" rtlCol="0" anchor="ctr"/>
+          <a:lstStyle/>
+          <a:p>
+            <a:pPr indent="0" marL="0">
+              <a:buNone/>
+            </a:pPr>
+            <a:r>
+              <a:rPr lang="en-US" sz="1700" b="1" dirty="0">
+                <a:solidFill>
+                  <a:srgbClr val="1B2430"/>
+                </a:solidFill>
+                <a:latin typeface="Calibri" pitchFamily="34" charset="0"/>
+                <a:ea typeface="Calibri" pitchFamily="34" charset="-122"/>
+                <a:cs typeface="Calibri" pitchFamily="34" charset="-120"/>
+              </a:rPr>
+              <a:t>Kimlik dogrulama</a:t>
+            </a:r>
+            <a:endParaRPr lang="en-US" sz="1700" dirty="0"/>
+          </a:p>
+        </p:txBody>
+      </p:sp>
+      <p:sp>
+        <p:nvSpPr>
+          <p:cNvPr id="12" name="Text 10"/>
+          <p:cNvSpPr/>
+          <p:nvPr/>
+        </p:nvSpPr>
+        <p:spPr>
+          <a:xfrm>
+            <a:off x="5394960" y="2679192"/>
+            <a:ext cx="5852160" cy="548640"/>
+          </a:xfrm>
+          <a:prstGeom prst="rect">
+            <a:avLst/>
+          </a:prstGeom>
+          <a:noFill/>
+          <a:ln/>
+        </p:spPr>
+        <p:txBody>
+          <a:bodyPr wrap="square" lIns="0" tIns="0" rIns="0" bIns="0" rtlCol="0" anchor="ctr"/>
+          <a:lstStyle/>
+          <a:p>
+            <a:pPr indent="0" marL="0">
+              <a:buNone/>
+            </a:pPr>
+            <a:r>
+              <a:rPr lang="en-US" sz="1350" dirty="0">
+                <a:solidFill>
+                  <a:srgbClr val="5B6B7B"/>
+                </a:solidFill>
+                <a:latin typeface="Calibri" pitchFamily="34" charset="0"/>
+                <a:ea typeface="Calibri" pitchFamily="34" charset="-122"/>
+                <a:cs typeface="Calibri" pitchFamily="34" charset="-120"/>
+              </a:rPr>
+              <a:t>JWT ile stateless oturum, rol bazli yetki, guvenlik sertlestirme.</a:t>
+            </a:r>
+            <a:endParaRPr lang="en-US" sz="1350" dirty="0"/>
+          </a:p>
+        </p:txBody>
+      </p:sp>
+      <p:sp>
+        <p:nvSpPr>
+          <p:cNvPr id="13" name="Shape 11"/>
+          <p:cNvSpPr/>
+          <p:nvPr/>
+        </p:nvSpPr>
+        <p:spPr>
+          <a:xfrm>
+            <a:off x="731520" y="3520440"/>
+            <a:ext cx="10698480" cy="841248"/>
+          </a:xfrm>
+          <a:prstGeom prst="roundRect">
+            <a:avLst>
+              <a:gd name="adj" fmla="val 10870"/>
+            </a:avLst>
+          </a:prstGeom>
+          <a:solidFill>
+            <a:srgbClr val="F4F8FB"/>
+          </a:solidFill>
+          <a:ln/>
+        </p:spPr>
+      </p:sp>
+      <p:sp>
+        <p:nvSpPr>
+          <p:cNvPr id="14" name="Shape 12"/>
+          <p:cNvSpPr/>
+          <p:nvPr/>
+        </p:nvSpPr>
+        <p:spPr>
+          <a:xfrm>
+            <a:off x="960120" y="3694176"/>
+            <a:ext cx="502920" cy="502920"/>
+          </a:xfrm>
+          <a:prstGeom prst="ellipse">
+            <a:avLst/>
+          </a:prstGeom>
+          <a:solidFill>
+            <a:srgbClr val="065A82"/>
+          </a:solidFill>
+          <a:ln/>
+        </p:spPr>
+      </p:sp>
+      <p:sp>
+        <p:nvSpPr>
+          <p:cNvPr id="15" name="Text 13"/>
+          <p:cNvSpPr/>
+          <p:nvPr/>
+        </p:nvSpPr>
+        <p:spPr>
+          <a:xfrm>
+            <a:off x="960120" y="3694176"/>
+            <a:ext cx="502920" cy="502920"/>
+          </a:xfrm>
+          <a:prstGeom prst="rect">
+            <a:avLst/>
+          </a:prstGeom>
+          <a:noFill/>
+          <a:ln/>
+        </p:spPr>
+        <p:txBody>
+          <a:bodyPr wrap="square" lIns="0" tIns="0" rIns="0" bIns="0" rtlCol="0" anchor="ctr"/>
+          <a:lstStyle/>
+          <a:p>
+            <a:pPr algn="ctr" indent="0" marL="0">
+              <a:buNone/>
+            </a:pPr>
+            <a:r>
+              <a:rPr lang="en-US" sz="1500" b="1" dirty="0">
+                <a:solidFill>
+                  <a:srgbClr val="FFFFFF"/>
+                </a:solidFill>
+                <a:latin typeface="Calibri" pitchFamily="34" charset="0"/>
+                <a:ea typeface="Calibri" pitchFamily="34" charset="-122"/>
+                <a:cs typeface="Calibri" pitchFamily="34" charset="-120"/>
+              </a:rPr>
+              <a:t>✓</a:t>
+            </a:r>
+            <a:endParaRPr lang="en-US" sz="1500" dirty="0"/>
+          </a:p>
+        </p:txBody>
+      </p:sp>
+      <p:sp>
+        <p:nvSpPr>
+          <p:cNvPr id="16" name="Text 14"/>
+          <p:cNvSpPr/>
+          <p:nvPr/>
+        </p:nvSpPr>
+        <p:spPr>
+          <a:xfrm>
+            <a:off x="1691640" y="3639312"/>
+            <a:ext cx="3657600" cy="548640"/>
+          </a:xfrm>
+          <a:prstGeom prst="rect">
+            <a:avLst/>
+          </a:prstGeom>
+          <a:noFill/>
+          <a:ln/>
+        </p:spPr>
+        <p:txBody>
+          <a:bodyPr wrap="square" lIns="0" tIns="0" rIns="0" bIns="0" rtlCol="0" anchor="ctr"/>
+          <a:lstStyle/>
+          <a:p>
+            <a:pPr indent="0" marL="0">
+              <a:buNone/>
+            </a:pPr>
+            <a:r>
+              <a:rPr lang="en-US" sz="1700" b="1" dirty="0">
+                <a:solidFill>
+                  <a:srgbClr val="1B2430"/>
+                </a:solidFill>
+                <a:latin typeface="Calibri" pitchFamily="34" charset="0"/>
+                <a:ea typeface="Calibri" pitchFamily="34" charset="-122"/>
+                <a:cs typeface="Calibri" pitchFamily="34" charset="-120"/>
+              </a:rPr>
+              <a:t>Arama muhendisligi</a:t>
+            </a:r>
+            <a:endParaRPr lang="en-US" sz="1700" dirty="0"/>
+          </a:p>
+        </p:txBody>
+      </p:sp>
+      <p:sp>
+        <p:nvSpPr>
+          <p:cNvPr id="17" name="Text 15"/>
+          <p:cNvSpPr/>
+          <p:nvPr/>
+        </p:nvSpPr>
+        <p:spPr>
+          <a:xfrm>
+            <a:off x="5394960" y="3639312"/>
+            <a:ext cx="5852160" cy="548640"/>
+          </a:xfrm>
+          <a:prstGeom prst="rect">
+            <a:avLst/>
+          </a:prstGeom>
+          <a:noFill/>
+          <a:ln/>
+        </p:spPr>
+        <p:txBody>
+          <a:bodyPr wrap="square" lIns="0" tIns="0" rIns="0" bIns="0" rtlCol="0" anchor="ctr"/>
+          <a:lstStyle/>
+          <a:p>
+            <a:pPr indent="0" marL="0">
+              <a:buNone/>
+            </a:pPr>
+            <a:r>
+              <a:rPr lang="en-US" sz="1350" dirty="0">
+                <a:solidFill>
+                  <a:srgbClr val="5B6B7B"/>
+                </a:solidFill>
+                <a:latin typeface="Calibri" pitchFamily="34" charset="0"/>
+                <a:ea typeface="Calibri" pitchFamily="34" charset="-122"/>
+                <a:cs typeface="Calibri" pitchFamily="34" charset="-120"/>
+              </a:rPr>
+              <a:t>Solr indexleme, range/facet sorgu, kendi kendini onarma.</a:t>
+            </a:r>
+            <a:endParaRPr lang="en-US" sz="1350" dirty="0"/>
+          </a:p>
+        </p:txBody>
+      </p:sp>
+      <p:sp>
+        <p:nvSpPr>
+          <p:cNvPr id="18" name="Shape 16"/>
+          <p:cNvSpPr/>
+          <p:nvPr/>
+        </p:nvSpPr>
+        <p:spPr>
+          <a:xfrm>
+            <a:off x="731520" y="4480560"/>
+            <a:ext cx="10698480" cy="841248"/>
+          </a:xfrm>
+          <a:prstGeom prst="roundRect">
+            <a:avLst>
+              <a:gd name="adj" fmla="val 10870"/>
+            </a:avLst>
+          </a:prstGeom>
+          <a:solidFill>
+            <a:srgbClr val="F4F8FB"/>
+          </a:solidFill>
+          <a:ln/>
+        </p:spPr>
+      </p:sp>
+      <p:sp>
+        <p:nvSpPr>
+          <p:cNvPr id="19" name="Shape 17"/>
+          <p:cNvSpPr/>
+          <p:nvPr/>
+        </p:nvSpPr>
+        <p:spPr>
+          <a:xfrm>
+            <a:off x="960120" y="4654296"/>
+            <a:ext cx="502920" cy="502920"/>
+          </a:xfrm>
+          <a:prstGeom prst="ellipse">
+            <a:avLst/>
+          </a:prstGeom>
+          <a:solidFill>
+            <a:srgbClr val="1C7293"/>
+          </a:solidFill>
+          <a:ln/>
+        </p:spPr>
+      </p:sp>
+      <p:sp>
+        <p:nvSpPr>
+          <p:cNvPr id="20" name="Text 18"/>
+          <p:cNvSpPr/>
+          <p:nvPr/>
+        </p:nvSpPr>
+        <p:spPr>
+          <a:xfrm>
+            <a:off x="960120" y="4654296"/>
+            <a:ext cx="502920" cy="502920"/>
+          </a:xfrm>
+          <a:prstGeom prst="rect">
+            <a:avLst/>
+          </a:prstGeom>
+          <a:noFill/>
+          <a:ln/>
+        </p:spPr>
+        <p:txBody>
+          <a:bodyPr wrap="square" lIns="0" tIns="0" rIns="0" bIns="0" rtlCol="0" anchor="ctr"/>
+          <a:lstStyle/>
+          <a:p>
+            <a:pPr algn="ctr" indent="0" marL="0">
+              <a:buNone/>
+            </a:pPr>
+            <a:r>
+              <a:rPr lang="en-US" sz="1500" b="1" dirty="0">
+                <a:solidFill>
+                  <a:srgbClr val="FFFFFF"/>
+                </a:solidFill>
+                <a:latin typeface="Calibri" pitchFamily="34" charset="0"/>
+                <a:ea typeface="Calibri" pitchFamily="34" charset="-122"/>
+                <a:cs typeface="Calibri" pitchFamily="34" charset="-120"/>
+              </a:rPr>
+              <a:t>✓</a:t>
+            </a:r>
+            <a:endParaRPr lang="en-US" sz="1500" dirty="0"/>
+          </a:p>
+        </p:txBody>
+      </p:sp>
+      <p:sp>
+        <p:nvSpPr>
+          <p:cNvPr id="21" name="Text 19"/>
+          <p:cNvSpPr/>
+          <p:nvPr/>
+        </p:nvSpPr>
+        <p:spPr>
+          <a:xfrm>
+            <a:off x="1691640" y="4599432"/>
+            <a:ext cx="3657600" cy="548640"/>
+          </a:xfrm>
+          <a:prstGeom prst="rect">
+            <a:avLst/>
+          </a:prstGeom>
+          <a:noFill/>
+          <a:ln/>
+        </p:spPr>
+        <p:txBody>
+          <a:bodyPr wrap="square" lIns="0" tIns="0" rIns="0" bIns="0" rtlCol="0" anchor="ctr"/>
+          <a:lstStyle/>
+          <a:p>
+            <a:pPr indent="0" marL="0">
+              <a:buNone/>
+            </a:pPr>
+            <a:r>
+              <a:rPr lang="en-US" sz="1700" b="1" dirty="0">
+                <a:solidFill>
+                  <a:srgbClr val="1B2430"/>
+                </a:solidFill>
+                <a:latin typeface="Calibri" pitchFamily="34" charset="0"/>
+                <a:ea typeface="Calibri" pitchFamily="34" charset="-122"/>
+                <a:cs typeface="Calibri" pitchFamily="34" charset="-120"/>
+              </a:rPr>
+              <a:t>Modern on yuz</a:t>
+            </a:r>
+            <a:endParaRPr lang="en-US" sz="1700" dirty="0"/>
+          </a:p>
+        </p:txBody>
+      </p:sp>
+      <p:sp>
+        <p:nvSpPr>
+          <p:cNvPr id="22" name="Text 20"/>
+          <p:cNvSpPr/>
+          <p:nvPr/>
+        </p:nvSpPr>
+        <p:spPr>
+          <a:xfrm>
+            <a:off x="5394960" y="4599432"/>
+            <a:ext cx="5852160" cy="548640"/>
+          </a:xfrm>
+          <a:prstGeom prst="rect">
+            <a:avLst/>
+          </a:prstGeom>
+          <a:noFill/>
+          <a:ln/>
+        </p:spPr>
+        <p:txBody>
+          <a:bodyPr wrap="square" lIns="0" tIns="0" rIns="0" bIns="0" rtlCol="0" anchor="ctr"/>
+          <a:lstStyle/>
+          <a:p>
+            <a:pPr indent="0" marL="0">
+              <a:buNone/>
+            </a:pPr>
+            <a:r>
+              <a:rPr lang="en-US" sz="1350" dirty="0">
+                <a:solidFill>
+                  <a:srgbClr val="5B6B7B"/>
+                </a:solidFill>
+                <a:latin typeface="Calibri" pitchFamily="34" charset="0"/>
+                <a:ea typeface="Calibri" pitchFamily="34" charset="-122"/>
+                <a:cs typeface="Calibri" pitchFamily="34" charset="-120"/>
+              </a:rPr>
+              <a:t>Angular signals, reactive formlar, bilesin mimarisi.</a:t>
+            </a:r>
+            <a:endParaRPr lang="en-US" sz="1350" dirty="0"/>
+          </a:p>
+        </p:txBody>
+      </p:sp>
+      <p:sp>
+        <p:nvSpPr>
+          <p:cNvPr id="23" name="Shape 21"/>
+          <p:cNvSpPr/>
+          <p:nvPr/>
+        </p:nvSpPr>
+        <p:spPr>
+          <a:xfrm>
+            <a:off x="731520" y="5440680"/>
+            <a:ext cx="10698480" cy="841248"/>
+          </a:xfrm>
+          <a:prstGeom prst="roundRect">
+            <a:avLst>
+              <a:gd name="adj" fmla="val 10870"/>
+            </a:avLst>
+          </a:prstGeom>
+          <a:solidFill>
+            <a:srgbClr val="F4F8FB"/>
+          </a:solidFill>
+          <a:ln/>
+        </p:spPr>
+      </p:sp>
+      <p:sp>
+        <p:nvSpPr>
+          <p:cNvPr id="24" name="Shape 22"/>
+          <p:cNvSpPr/>
+          <p:nvPr/>
+        </p:nvSpPr>
+        <p:spPr>
+          <a:xfrm>
+            <a:off x="960120" y="5614416"/>
+            <a:ext cx="502920" cy="502920"/>
+          </a:xfrm>
+          <a:prstGeom prst="ellipse">
+            <a:avLst/>
+          </a:prstGeom>
+          <a:solidFill>
+            <a:srgbClr val="065A82"/>
+          </a:solidFill>
+          <a:ln/>
+        </p:spPr>
+      </p:sp>
+      <p:sp>
+        <p:nvSpPr>
+          <p:cNvPr id="25" name="Text 23"/>
+          <p:cNvSpPr/>
+          <p:nvPr/>
+        </p:nvSpPr>
+        <p:spPr>
+          <a:xfrm>
+            <a:off x="960120" y="5614416"/>
+            <a:ext cx="502920" cy="502920"/>
+          </a:xfrm>
+          <a:prstGeom prst="rect">
+            <a:avLst/>
+          </a:prstGeom>
+          <a:noFill/>
+          <a:ln/>
+        </p:spPr>
+        <p:txBody>
+          <a:bodyPr wrap="square" lIns="0" tIns="0" rIns="0" bIns="0" rtlCol="0" anchor="ctr"/>
+          <a:lstStyle/>
+          <a:p>
+            <a:pPr algn="ctr" indent="0" marL="0">
+              <a:buNone/>
+            </a:pPr>
+            <a:r>
+              <a:rPr lang="en-US" sz="1500" b="1" dirty="0">
+                <a:solidFill>
+                  <a:srgbClr val="FFFFFF"/>
+                </a:solidFill>
+                <a:latin typeface="Calibri" pitchFamily="34" charset="0"/>
+                <a:ea typeface="Calibri" pitchFamily="34" charset="-122"/>
+                <a:cs typeface="Calibri" pitchFamily="34" charset="-120"/>
+              </a:rPr>
+              <a:t>✓</a:t>
+            </a:r>
+            <a:endParaRPr lang="en-US" sz="1500" dirty="0"/>
+          </a:p>
+        </p:txBody>
+      </p:sp>
+      <p:sp>
+        <p:nvSpPr>
+          <p:cNvPr id="26" name="Text 24"/>
+          <p:cNvSpPr/>
+          <p:nvPr/>
+        </p:nvSpPr>
+        <p:spPr>
+          <a:xfrm>
+            <a:off x="1691640" y="5559552"/>
+            <a:ext cx="3657600" cy="548640"/>
+          </a:xfrm>
+          <a:prstGeom prst="rect">
+            <a:avLst/>
+          </a:prstGeom>
+          <a:noFill/>
+          <a:ln/>
+        </p:spPr>
+        <p:txBody>
+          <a:bodyPr wrap="square" lIns="0" tIns="0" rIns="0" bIns="0" rtlCol="0" anchor="ctr"/>
+          <a:lstStyle/>
+          <a:p>
+            <a:pPr indent="0" marL="0">
+              <a:buNone/>
+            </a:pPr>
+            <a:r>
+              <a:rPr lang="en-US" sz="1700" b="1" dirty="0">
+                <a:solidFill>
+                  <a:srgbClr val="1B2430"/>
+                </a:solidFill>
+                <a:latin typeface="Calibri" pitchFamily="34" charset="0"/>
+                <a:ea typeface="Calibri" pitchFamily="34" charset="-122"/>
+                <a:cs typeface="Calibri" pitchFamily="34" charset="-120"/>
+              </a:rPr>
+              <a:t>Deploy + CI</a:t>
+            </a:r>
+            <a:endParaRPr lang="en-US" sz="1700" dirty="0"/>
+          </a:p>
+        </p:txBody>
+      </p:sp>
+      <p:sp>
+        <p:nvSpPr>
+          <p:cNvPr id="27" name="Text 25"/>
+          <p:cNvSpPr/>
+          <p:nvPr/>
+        </p:nvSpPr>
+        <p:spPr>
+          <a:xfrm>
+            <a:off x="5394960" y="5559552"/>
+            <a:ext cx="5852160" cy="548640"/>
+          </a:xfrm>
+          <a:prstGeom prst="rect">
+            <a:avLst/>
+          </a:prstGeom>
+          <a:noFill/>
+          <a:ln/>
+        </p:spPr>
+        <p:txBody>
+          <a:bodyPr wrap="square" lIns="0" tIns="0" rIns="0" bIns="0" rtlCol="0" anchor="ctr"/>
+          <a:lstStyle/>
+          <a:p>
+            <a:pPr indent="0" marL="0">
+              <a:buNone/>
+            </a:pPr>
+            <a:r>
+              <a:rPr lang="en-US" sz="1350" dirty="0">
+                <a:solidFill>
+                  <a:srgbClr val="5B6B7B"/>
+                </a:solidFill>
+                <a:latin typeface="Calibri" pitchFamily="34" charset="0"/>
+                <a:ea typeface="Calibri" pitchFamily="34" charset="-122"/>
+                <a:cs typeface="Calibri" pitchFamily="34" charset="-120"/>
+              </a:rPr>
+              <a:t>Vercel + Render + Docker, GitHub Actions ile test otomasyonu.</a:t>
+            </a:r>
+            <a:endParaRPr lang="en-US" sz="1350" dirty="0"/>
+          </a:p>
+        </p:txBody>
+      </p:sp>
+    </p:spTree>
+  </p:cSld>
+  <p:clrMapOvr>
+    <a:masterClrMapping/>
+  </p:clrMapOvr>
+</p:sld>
+</file>
+
+<file path=ppt/slides/slide11.xml><?xml version="1.0" encoding="utf-8"?>
+<p:sld xmlns:a="http://schemas.openxmlformats.org/drawingml/2006/main" xmlns:r="http://schemas.openxmlformats.org/officeDocument/2006/relationships" xmlns:p="http://schemas.openxmlformats.org/presentationml/2006/main">
+  <p:cSld name="Slide 11">
+    <p:bg>
+      <p:bgPr>
+        <a:solidFill>
+          <a:srgbClr val="21295C"/>
+        </a:solidFill>
+      </p:bgPr>
+    </p:bg>
+    <p:spTree>
+      <p:nvGrpSpPr>
+        <p:cNvPr id="1" name=""/>
+        <p:cNvGrpSpPr/>
+        <p:nvPr/>
+      </p:nvGrpSpPr>
+      <p:grpSpPr>
+        <a:xfrm>
+          <a:off x="0" y="0"/>
+          <a:ext cx="0" cy="0"/>
+          <a:chOff x="0" y="0"/>
+          <a:chExt cx="0" cy="0"/>
+        </a:xfrm>
+      </p:grpSpPr>
+      <p:sp>
+        <p:nvSpPr>
+          <p:cNvPr id="2" name="Shape 0"/>
+          <p:cNvSpPr/>
+          <p:nvPr/>
+        </p:nvSpPr>
+        <p:spPr>
+          <a:xfrm>
+            <a:off x="8961120" y="3291840"/>
+            <a:ext cx="4572000" cy="4572000"/>
+          </a:xfrm>
+          <a:prstGeom prst="ellipse">
+            <a:avLst/>
+          </a:prstGeom>
+          <a:solidFill>
+            <a:srgbClr val="065A82"/>
+          </a:solidFill>
+          <a:ln/>
+        </p:spPr>
+      </p:sp>
+      <p:sp>
+        <p:nvSpPr>
+          <p:cNvPr id="3" name="Text 1"/>
+          <p:cNvSpPr/>
+          <p:nvPr/>
+        </p:nvSpPr>
+        <p:spPr>
+          <a:xfrm>
+            <a:off x="822960" y="1280160"/>
+            <a:ext cx="7315200" cy="457200"/>
+          </a:xfrm>
+          <a:prstGeom prst="rect">
+            <a:avLst/>
+          </a:prstGeom>
+          <a:noFill/>
+          <a:ln/>
+        </p:spPr>
+        <p:txBody>
+          <a:bodyPr wrap="square" lIns="0" tIns="0" rIns="0" bIns="0" rtlCol="0" anchor="ctr"/>
+          <a:lstStyle/>
+          <a:p>
+            <a:pPr indent="0" marL="0">
+              <a:buNone/>
+            </a:pPr>
+            <a:r>
+              <a:rPr lang="en-US" sz="1500" b="1" spc="300" kern="0" dirty="0">
+                <a:solidFill>
+                  <a:srgbClr val="02C39A"/>
+                </a:solidFill>
+                <a:latin typeface="Calibri" pitchFamily="34" charset="0"/>
+                <a:ea typeface="Calibri" pitchFamily="34" charset="-122"/>
+                <a:cs typeface="Calibri" pitchFamily="34" charset="-120"/>
+              </a:rPr>
+              <a:t>Ozetle</a:t>
+            </a:r>
+            <a:endParaRPr lang="en-US" sz="1500" dirty="0"/>
+          </a:p>
+        </p:txBody>
+      </p:sp>
+      <p:sp>
+        <p:nvSpPr>
+          <p:cNvPr id="4" name="Text 2"/>
+          <p:cNvSpPr/>
+          <p:nvPr/>
+        </p:nvSpPr>
+        <p:spPr>
+          <a:xfrm>
+            <a:off x="777240" y="1783080"/>
+            <a:ext cx="9144000" cy="1554480"/>
+          </a:xfrm>
+          <a:prstGeom prst="rect">
+            <a:avLst/>
+          </a:prstGeom>
+          <a:noFill/>
+          <a:ln/>
+        </p:spPr>
+        <p:txBody>
+          <a:bodyPr wrap="square" lIns="0" tIns="0" rIns="0" bIns="0" rtlCol="0" anchor="ctr"/>
+          <a:lstStyle/>
+          <a:p>
+            <a:pPr indent="0" marL="0">
+              <a:lnSpc>
+                <a:spcPct val="105000"/>
+              </a:lnSpc>
+              <a:buNone/>
+            </a:pPr>
+            <a:r>
+              <a:rPr lang="en-US" sz="3800" b="1" dirty="0">
+                <a:solidFill>
+                  <a:srgbClr val="FFFFFF"/>
+                </a:solidFill>
+                <a:latin typeface="Cambria" pitchFamily="34" charset="0"/>
+                <a:ea typeface="Cambria" pitchFamily="34" charset="-122"/>
+                <a:cs typeface="Cambria" pitchFamily="34" charset="-120"/>
+              </a:rPr>
+              <a:t>Uctan uca calisan,</a:t>
+            </a:r>
+            <a:endParaRPr lang="en-US" sz="3800" dirty="0"/>
+          </a:p>
+          <a:p>
+            <a:pPr indent="0" marL="0">
+              <a:lnSpc>
+                <a:spcPct val="105000"/>
+              </a:lnSpc>
+              <a:buNone/>
+            </a:pPr>
+            <a:r>
+              <a:rPr lang="en-US" sz="3800" b="1" dirty="0">
+                <a:solidFill>
+                  <a:srgbClr val="FFFFFF"/>
+                </a:solidFill>
+                <a:latin typeface="Cambria" pitchFamily="34" charset="0"/>
+                <a:ea typeface="Cambria" pitchFamily="34" charset="-122"/>
+                <a:cs typeface="Cambria" pitchFamily="34" charset="-120"/>
+              </a:rPr>
+              <a:t>gercek bir web uygulamasi.</a:t>
+            </a:r>
+            <a:endParaRPr lang="en-US" sz="3800" dirty="0"/>
+          </a:p>
+        </p:txBody>
+      </p:sp>
+      <p:sp>
+        <p:nvSpPr>
+          <p:cNvPr id="5" name="Text 3"/>
+          <p:cNvSpPr/>
+          <p:nvPr/>
+        </p:nvSpPr>
+        <p:spPr>
+          <a:xfrm>
+            <a:off x="822960" y="3611880"/>
+            <a:ext cx="8686800" cy="914400"/>
+          </a:xfrm>
+          <a:prstGeom prst="rect">
+            <a:avLst/>
+          </a:prstGeom>
+          <a:noFill/>
+          <a:ln/>
+        </p:spPr>
+        <p:txBody>
+          <a:bodyPr wrap="square" lIns="0" tIns="0" rIns="0" bIns="0" rtlCol="0" anchor="ctr"/>
+          <a:lstStyle/>
+          <a:p>
+            <a:pPr indent="0" marL="0">
+              <a:lnSpc>
+                <a:spcPct val="120000"/>
+              </a:lnSpc>
+              <a:buNone/>
+            </a:pPr>
+            <a:r>
+              <a:rPr lang="en-US" sz="1700" dirty="0">
+                <a:solidFill>
+                  <a:srgbClr val="CADCFC"/>
+                </a:solidFill>
+                <a:latin typeface="Calibri" pitchFamily="34" charset="0"/>
+                <a:ea typeface="Calibri" pitchFamily="34" charset="-122"/>
+                <a:cs typeface="Calibri" pitchFamily="34" charset="-120"/>
+              </a:rPr>
+              <a:t>On yuz + arka yuz + arama motoru + veritabani + guvenlik + deploy.</a:t>
+            </a:r>
+            <a:endParaRPr lang="en-US" sz="1700" dirty="0"/>
+          </a:p>
+          <a:p>
+            <a:pPr indent="0" marL="0">
+              <a:lnSpc>
+                <a:spcPct val="120000"/>
+              </a:lnSpc>
+              <a:buNone/>
+            </a:pPr>
+            <a:r>
+              <a:rPr lang="en-US" sz="1700" dirty="0">
+                <a:solidFill>
+                  <a:srgbClr val="CADCFC"/>
+                </a:solidFill>
+                <a:latin typeface="Calibri" pitchFamily="34" charset="0"/>
+                <a:ea typeface="Calibri" pitchFamily="34" charset="-122"/>
+                <a:cs typeface="Calibri" pitchFamily="34" charset="-120"/>
+              </a:rPr>
+              <a:t>Hepsi tek projede birlesti — ve CANLI.</a:t>
+            </a:r>
+            <a:endParaRPr lang="en-US" sz="1700" dirty="0"/>
+          </a:p>
+        </p:txBody>
+      </p:sp>
+      <p:sp>
+        <p:nvSpPr>
+          <p:cNvPr id="6" name="Text 4"/>
+          <p:cNvSpPr/>
+          <p:nvPr/>
+        </p:nvSpPr>
+        <p:spPr>
+          <a:xfrm>
+            <a:off x="822960" y="4800600"/>
+            <a:ext cx="8229600" cy="411480"/>
+          </a:xfrm>
+          <a:prstGeom prst="rect">
+            <a:avLst/>
+          </a:prstGeom>
+          <a:noFill/>
+          <a:ln/>
+        </p:spPr>
+        <p:txBody>
+          <a:bodyPr wrap="square" lIns="0" tIns="0" rIns="0" bIns="0" rtlCol="0" anchor="ctr"/>
+          <a:lstStyle/>
+          <a:p>
+            <a:pPr indent="0" marL="0">
+              <a:buNone/>
+            </a:pPr>
+            <a:r>
+              <a:rPr lang="en-US" sz="1700" b="1" dirty="0">
+                <a:solidFill>
+                  <a:srgbClr val="02C39A"/>
+                </a:solidFill>
+                <a:latin typeface="Calibri" pitchFamily="34" charset="0"/>
+                <a:ea typeface="Calibri" pitchFamily="34" charset="-122"/>
+                <a:cs typeface="Calibri" pitchFamily="34" charset="-120"/>
+              </a:rPr>
+              <a:t>hotel-commerce-service.vercel.app</a:t>
+            </a:r>
+            <a:endParaRPr lang="en-US" sz="1700" dirty="0"/>
+          </a:p>
+        </p:txBody>
+      </p:sp>
+      <p:sp>
+        <p:nvSpPr>
+          <p:cNvPr id="7" name="Text 5"/>
+          <p:cNvSpPr/>
+          <p:nvPr/>
+        </p:nvSpPr>
+        <p:spPr>
+          <a:xfrm>
+            <a:off x="822960" y="5440680"/>
+            <a:ext cx="8229600" cy="457200"/>
+          </a:xfrm>
+          <a:prstGeom prst="rect">
+            <a:avLst/>
+          </a:prstGeom>
+          <a:noFill/>
+          <a:ln/>
+        </p:spPr>
+        <p:txBody>
+          <a:bodyPr wrap="square" lIns="0" tIns="0" rIns="0" bIns="0" rtlCol="0" anchor="ctr"/>
+          <a:lstStyle/>
+          <a:p>
+            <a:pPr indent="0" marL="0">
+              <a:buNone/>
+            </a:pPr>
+            <a:r>
+              <a:rPr lang="en-US" sz="1800" b="1" dirty="0">
+                <a:solidFill>
+                  <a:srgbClr val="FFFFFF"/>
+                </a:solidFill>
+                <a:latin typeface="Calibri" pitchFamily="34" charset="0"/>
+                <a:ea typeface="Calibri" pitchFamily="34" charset="-122"/>
+                <a:cs typeface="Calibri" pitchFamily="34" charset="-120"/>
+              </a:rPr>
+              <a:t>Tesekkurler  ·  Sorular?</a:t>
+            </a:r>
+            <a:endParaRPr lang="en-US" sz="1800" dirty="0"/>
+          </a:p>
+        </p:txBody>
+      </p:sp>
+    </p:spTree>
+  </p:cSld>
+  <p:clrMapOvr>
+    <a:masterClrMapping/>
+  </p:clrMapOvr>
+</p:sld>
+</file>
+
 <file path=ppt/slides/slide2.xml><?xml version="1.0" encoding="utf-8"?>
 <p:sld xmlns:a="http://schemas.openxmlformats.org/drawingml/2006/main" xmlns:r="http://schemas.openxmlformats.org/officeDocument/2006/relationships" xmlns:p="http://schemas.openxmlformats.org/presentationml/2006/main">
   <p:cSld name="Slide 2">
@@ -5695,7 +7032,7 @@
               <a:buNone/>
             </a:pPr>
             <a:r>
-              <a:rPr lang="en-US" sz="3400" b="1" dirty="0">
+              <a:rPr lang="en-US" sz="3600" b="1" dirty="0">
                 <a:solidFill>
                   <a:srgbClr val="1B2430"/>
                 </a:solidFill>
@@ -5703,33 +7040,50 @@
                 <a:ea typeface="Cambria" pitchFamily="34" charset="-122"/>
                 <a:cs typeface="Cambria" pitchFamily="34" charset="-120"/>
               </a:rPr>
-              <a:t>Teknik olarak ogrendiklerim</a:t>
-            </a:r>
-            <a:endParaRPr lang="en-US" sz="3400" dirty="0"/>
-          </a:p>
-        </p:txBody>
-      </p:sp>
-      <p:sp>
-        <p:nvSpPr>
-          <p:cNvPr id="3" name="Shape 1"/>
-          <p:cNvSpPr/>
-          <p:nvPr/>
-        </p:nvSpPr>
-        <p:spPr>
-          <a:xfrm>
-            <a:off x="731520" y="1600200"/>
-            <a:ext cx="10698480" cy="841248"/>
-          </a:xfrm>
-          <a:prstGeom prst="roundRect">
-            <a:avLst>
-              <a:gd name="adj" fmla="val 10870"/>
-            </a:avLst>
-          </a:prstGeom>
-          <a:solidFill>
-            <a:srgbClr val="F4F8FB"/>
-          </a:solidFill>
-          <a:ln/>
-        </p:spPr>
+              <a:t>Akilli fiyat filtresi</a:t>
+            </a:r>
+            <a:endParaRPr lang="en-US" sz="3600" dirty="0"/>
+          </a:p>
+        </p:txBody>
+      </p:sp>
+      <p:sp>
+        <p:nvSpPr>
+          <p:cNvPr id="3" name="Text 1"/>
+          <p:cNvSpPr/>
+          <p:nvPr/>
+        </p:nvSpPr>
+        <p:spPr>
+          <a:xfrm>
+            <a:off x="777240" y="1280160"/>
+            <a:ext cx="10515600" cy="457200"/>
+          </a:xfrm>
+          <a:prstGeom prst="rect">
+            <a:avLst/>
+          </a:prstGeom>
+          <a:noFill/>
+          <a:ln/>
+        </p:spPr>
+        <p:txBody>
+          <a:bodyPr wrap="square" lIns="0" tIns="0" rIns="0" bIns="0" rtlCol="0" anchor="ctr"/>
+          <a:lstStyle/>
+          <a:p>
+            <a:pPr indent="0" marL="0">
+              <a:buNone/>
+            </a:pPr>
+            <a:r>
+              <a:rPr lang="en-US" sz="1600" dirty="0">
+                <a:solidFill>
+                  <a:srgbClr val="5B6B7B"/>
+                </a:solidFill>
+                <a:latin typeface="Calibri" pitchFamily="34" charset="0"/>
+                <a:ea typeface="Calibri" pitchFamily="34" charset="-122"/>
+                <a:cs typeface="Calibri" pitchFamily="34" charset="-120"/>
+              </a:rPr>
+              <a:t>Tek fiyat kaynagi — arama, detay ve rezervasyon hep ayni.</a:t>
+            </a:r>
+            <a:endParaRPr lang="en-US" sz="1600" dirty="0"/>
+          </a:p>
+        </p:txBody>
       </p:sp>
       <p:sp>
         <p:nvSpPr>
@@ -5739,8 +7093,8 @@
         </p:nvSpPr>
         <p:spPr>
           <a:xfrm>
-            <a:off x="960120" y="1773936"/>
-            <a:ext cx="502920" cy="502920"/>
+            <a:off x="777240" y="1783080"/>
+            <a:ext cx="530352" cy="530352"/>
           </a:xfrm>
           <a:prstGeom prst="ellipse">
             <a:avLst/>
@@ -5759,8 +7113,8 @@
         </p:nvSpPr>
         <p:spPr>
           <a:xfrm>
-            <a:off x="960120" y="1773936"/>
-            <a:ext cx="502920" cy="502920"/>
+            <a:off x="777240" y="1783080"/>
+            <a:ext cx="530352" cy="530352"/>
           </a:xfrm>
           <a:prstGeom prst="rect">
             <a:avLst/>
@@ -5784,7 +7138,7 @@
                 <a:ea typeface="Calibri" pitchFamily="34" charset="-122"/>
                 <a:cs typeface="Calibri" pitchFamily="34" charset="-120"/>
               </a:rPr>
-              <a:t>✓</a:t>
+              <a:t>1</a:t>
             </a:r>
             <a:endParaRPr lang="en-US" sz="1500" dirty="0"/>
           </a:p>
@@ -5798,24 +7152,24 @@
         </p:nvSpPr>
         <p:spPr>
           <a:xfrm>
-            <a:off x="1691640" y="1719072"/>
-            <a:ext cx="3657600" cy="548640"/>
-          </a:xfrm>
-          <a:prstGeom prst="rect">
-            <a:avLst/>
-          </a:prstGeom>
-          <a:noFill/>
-          <a:ln/>
-        </p:spPr>
-        <p:txBody>
-          <a:bodyPr wrap="square" lIns="0" tIns="0" rIns="0" bIns="0" rtlCol="0" anchor="ctr"/>
-          <a:lstStyle/>
-          <a:p>
-            <a:pPr indent="0" marL="0">
-              <a:buNone/>
-            </a:pPr>
-            <a:r>
-              <a:rPr lang="en-US" sz="1700" b="1" dirty="0">
+            <a:off x="1508760" y="1764792"/>
+            <a:ext cx="9784080" cy="365760"/>
+          </a:xfrm>
+          <a:prstGeom prst="rect">
+            <a:avLst/>
+          </a:prstGeom>
+          <a:noFill/>
+          <a:ln/>
+        </p:spPr>
+        <p:txBody>
+          <a:bodyPr wrap="square" lIns="0" tIns="0" rIns="0" bIns="0" rtlCol="0" anchor="ctr"/>
+          <a:lstStyle/>
+          <a:p>
+            <a:pPr indent="0" marL="0">
+              <a:buNone/>
+            </a:pPr>
+            <a:r>
+              <a:rPr lang="en-US" sz="1800" b="1" dirty="0">
                 <a:solidFill>
                   <a:srgbClr val="1B2430"/>
                 </a:solidFill>
@@ -5823,9 +7177,9 @@
                 <a:ea typeface="Calibri" pitchFamily="34" charset="-122"/>
                 <a:cs typeface="Calibri" pitchFamily="34" charset="-120"/>
               </a:rPr>
-              <a:t>REST API tasarimi</a:t>
-            </a:r>
-            <a:endParaRPr lang="en-US" sz="1700" dirty="0"/>
+              <a:t>En ucuz oda fiyati saklanir</a:t>
+            </a:r>
+            <a:endParaRPr lang="en-US" sz="1800" dirty="0"/>
           </a:p>
         </p:txBody>
       </p:sp>
@@ -5837,8 +7191,8 @@
         </p:nvSpPr>
         <p:spPr>
           <a:xfrm>
-            <a:off x="5394960" y="1719072"/>
-            <a:ext cx="5852160" cy="548640"/>
+            <a:off x="1508760" y="2130552"/>
+            <a:ext cx="9784080" cy="384048"/>
           </a:xfrm>
           <a:prstGeom prst="rect">
             <a:avLst/>
@@ -5862,7 +7216,7 @@
                 <a:ea typeface="Calibri" pitchFamily="34" charset="-122"/>
                 <a:cs typeface="Calibri" pitchFamily="34" charset="-120"/>
               </a:rPr>
-              <a:t>Controller / Service / Repository katmanlari ile temiz mimari.</a:t>
+              <a:t>Her otelin en dusuk oda fiyati veritabaninda tutulup Solr'a indexlenir.</a:t>
             </a:r>
             <a:endParaRPr lang="en-US" sz="1350" dirty="0"/>
           </a:p>
@@ -5876,30 +7230,8 @@
         </p:nvSpPr>
         <p:spPr>
           <a:xfrm>
-            <a:off x="731520" y="2560320"/>
-            <a:ext cx="10698480" cy="841248"/>
-          </a:xfrm>
-          <a:prstGeom prst="roundRect">
-            <a:avLst>
-              <a:gd name="adj" fmla="val 10870"/>
-            </a:avLst>
-          </a:prstGeom>
-          <a:solidFill>
-            <a:srgbClr val="F4F8FB"/>
-          </a:solidFill>
-          <a:ln/>
-        </p:spPr>
-      </p:sp>
-      <p:sp>
-        <p:nvSpPr>
-          <p:cNvPr id="9" name="Shape 7"/>
-          <p:cNvSpPr/>
-          <p:nvPr/>
-        </p:nvSpPr>
-        <p:spPr>
-          <a:xfrm>
-            <a:off x="960120" y="2734056"/>
-            <a:ext cx="502920" cy="502920"/>
+            <a:off x="777240" y="2834640"/>
+            <a:ext cx="530352" cy="530352"/>
           </a:xfrm>
           <a:prstGeom prst="ellipse">
             <a:avLst/>
@@ -5912,40 +7244,79 @@
       </p:sp>
       <p:sp>
         <p:nvSpPr>
+          <p:cNvPr id="9" name="Text 7"/>
+          <p:cNvSpPr/>
+          <p:nvPr/>
+        </p:nvSpPr>
+        <p:spPr>
+          <a:xfrm>
+            <a:off x="777240" y="2834640"/>
+            <a:ext cx="530352" cy="530352"/>
+          </a:xfrm>
+          <a:prstGeom prst="rect">
+            <a:avLst/>
+          </a:prstGeom>
+          <a:noFill/>
+          <a:ln/>
+        </p:spPr>
+        <p:txBody>
+          <a:bodyPr wrap="square" lIns="0" tIns="0" rIns="0" bIns="0" rtlCol="0" anchor="ctr"/>
+          <a:lstStyle/>
+          <a:p>
+            <a:pPr algn="ctr" indent="0" marL="0">
+              <a:buNone/>
+            </a:pPr>
+            <a:r>
+              <a:rPr lang="en-US" sz="1500" b="1" dirty="0">
+                <a:solidFill>
+                  <a:srgbClr val="FFFFFF"/>
+                </a:solidFill>
+                <a:latin typeface="Calibri" pitchFamily="34" charset="0"/>
+                <a:ea typeface="Calibri" pitchFamily="34" charset="-122"/>
+                <a:cs typeface="Calibri" pitchFamily="34" charset="-120"/>
+              </a:rPr>
+              <a:t>2</a:t>
+            </a:r>
+            <a:endParaRPr lang="en-US" sz="1500" dirty="0"/>
+          </a:p>
+        </p:txBody>
+      </p:sp>
+      <p:sp>
+        <p:nvSpPr>
           <p:cNvPr id="10" name="Text 8"/>
           <p:cNvSpPr/>
           <p:nvPr/>
         </p:nvSpPr>
         <p:spPr>
           <a:xfrm>
-            <a:off x="960120" y="2734056"/>
-            <a:ext cx="502920" cy="502920"/>
-          </a:xfrm>
-          <a:prstGeom prst="rect">
-            <a:avLst/>
-          </a:prstGeom>
-          <a:noFill/>
-          <a:ln/>
-        </p:spPr>
-        <p:txBody>
-          <a:bodyPr wrap="square" lIns="0" tIns="0" rIns="0" bIns="0" rtlCol="0" anchor="ctr"/>
-          <a:lstStyle/>
-          <a:p>
-            <a:pPr algn="ctr" indent="0" marL="0">
-              <a:buNone/>
-            </a:pPr>
-            <a:r>
-              <a:rPr lang="en-US" sz="1500" b="1" dirty="0">
-                <a:solidFill>
-                  <a:srgbClr val="FFFFFF"/>
-                </a:solidFill>
-                <a:latin typeface="Calibri" pitchFamily="34" charset="0"/>
-                <a:ea typeface="Calibri" pitchFamily="34" charset="-122"/>
-                <a:cs typeface="Calibri" pitchFamily="34" charset="-120"/>
-              </a:rPr>
-              <a:t>✓</a:t>
-            </a:r>
-            <a:endParaRPr lang="en-US" sz="1500" dirty="0"/>
+            <a:off x="1508760" y="2816352"/>
+            <a:ext cx="9784080" cy="365760"/>
+          </a:xfrm>
+          <a:prstGeom prst="rect">
+            <a:avLst/>
+          </a:prstGeom>
+          <a:noFill/>
+          <a:ln/>
+        </p:spPr>
+        <p:txBody>
+          <a:bodyPr wrap="square" lIns="0" tIns="0" rIns="0" bIns="0" rtlCol="0" anchor="ctr"/>
+          <a:lstStyle/>
+          <a:p>
+            <a:pPr indent="0" marL="0">
+              <a:buNone/>
+            </a:pPr>
+            <a:r>
+              <a:rPr lang="en-US" sz="1800" b="1" dirty="0">
+                <a:solidFill>
+                  <a:srgbClr val="1B2430"/>
+                </a:solidFill>
+                <a:latin typeface="Calibri" pitchFamily="34" charset="0"/>
+                <a:ea typeface="Calibri" pitchFamily="34" charset="-122"/>
+                <a:cs typeface="Calibri" pitchFamily="34" charset="-120"/>
+              </a:rPr>
+              <a:t>Aralik ile filtrele</a:t>
+            </a:r>
+            <a:endParaRPr lang="en-US" sz="1800" dirty="0"/>
           </a:p>
         </p:txBody>
       </p:sp>
@@ -5957,47 +7328,8 @@
         </p:nvSpPr>
         <p:spPr>
           <a:xfrm>
-            <a:off x="1691640" y="2679192"/>
-            <a:ext cx="3657600" cy="548640"/>
-          </a:xfrm>
-          <a:prstGeom prst="rect">
-            <a:avLst/>
-          </a:prstGeom>
-          <a:noFill/>
-          <a:ln/>
-        </p:spPr>
-        <p:txBody>
-          <a:bodyPr wrap="square" lIns="0" tIns="0" rIns="0" bIns="0" rtlCol="0" anchor="ctr"/>
-          <a:lstStyle/>
-          <a:p>
-            <a:pPr indent="0" marL="0">
-              <a:buNone/>
-            </a:pPr>
-            <a:r>
-              <a:rPr lang="en-US" sz="1700" b="1" dirty="0">
-                <a:solidFill>
-                  <a:srgbClr val="1B2430"/>
-                </a:solidFill>
-                <a:latin typeface="Calibri" pitchFamily="34" charset="0"/>
-                <a:ea typeface="Calibri" pitchFamily="34" charset="-122"/>
-                <a:cs typeface="Calibri" pitchFamily="34" charset="-120"/>
-              </a:rPr>
-              <a:t>Kimlik dogrulama</a:t>
-            </a:r>
-            <a:endParaRPr lang="en-US" sz="1700" dirty="0"/>
-          </a:p>
-        </p:txBody>
-      </p:sp>
-      <p:sp>
-        <p:nvSpPr>
-          <p:cNvPr id="12" name="Text 10"/>
-          <p:cNvSpPr/>
-          <p:nvPr/>
-        </p:nvSpPr>
-        <p:spPr>
-          <a:xfrm>
-            <a:off x="5394960" y="2679192"/>
-            <a:ext cx="5852160" cy="548640"/>
+            <a:off x="1508760" y="3182112"/>
+            <a:ext cx="9784080" cy="384048"/>
           </a:xfrm>
           <a:prstGeom prst="rect">
             <a:avLst/>
@@ -6021,7 +7353,7 @@
                 <a:ea typeface="Calibri" pitchFamily="34" charset="-122"/>
                 <a:cs typeface="Calibri" pitchFamily="34" charset="-120"/>
               </a:rPr>
-              <a:t>JWT ile stateless oturum ve rol bazli yetkilendirme.</a:t>
+              <a:t>Kullanici fiyat araligi secer; Solr range sorgusu (minPrice:[a TO b]) calisir.</a:t>
             </a:r>
             <a:endParaRPr lang="en-US" sz="1350" dirty="0"/>
           </a:p>
@@ -6029,36 +7361,14 @@
       </p:sp>
       <p:sp>
         <p:nvSpPr>
-          <p:cNvPr id="13" name="Shape 11"/>
-          <p:cNvSpPr/>
-          <p:nvPr/>
-        </p:nvSpPr>
-        <p:spPr>
-          <a:xfrm>
-            <a:off x="731520" y="3520440"/>
-            <a:ext cx="10698480" cy="841248"/>
-          </a:xfrm>
-          <a:prstGeom prst="roundRect">
-            <a:avLst>
-              <a:gd name="adj" fmla="val 10870"/>
-            </a:avLst>
-          </a:prstGeom>
-          <a:solidFill>
-            <a:srgbClr val="F4F8FB"/>
-          </a:solidFill>
-          <a:ln/>
-        </p:spPr>
-      </p:sp>
-      <p:sp>
-        <p:nvSpPr>
-          <p:cNvPr id="14" name="Shape 12"/>
-          <p:cNvSpPr/>
-          <p:nvPr/>
-        </p:nvSpPr>
-        <p:spPr>
-          <a:xfrm>
-            <a:off x="960120" y="3694176"/>
-            <a:ext cx="502920" cy="502920"/>
+          <p:cNvPr id="12" name="Shape 10"/>
+          <p:cNvSpPr/>
+          <p:nvPr/>
+        </p:nvSpPr>
+        <p:spPr>
+          <a:xfrm>
+            <a:off x="777240" y="3886200"/>
+            <a:ext cx="530352" cy="530352"/>
           </a:xfrm>
           <a:prstGeom prst="ellipse">
             <a:avLst/>
@@ -6071,92 +7381,92 @@
       </p:sp>
       <p:sp>
         <p:nvSpPr>
+          <p:cNvPr id="13" name="Text 11"/>
+          <p:cNvSpPr/>
+          <p:nvPr/>
+        </p:nvSpPr>
+        <p:spPr>
+          <a:xfrm>
+            <a:off x="777240" y="3886200"/>
+            <a:ext cx="530352" cy="530352"/>
+          </a:xfrm>
+          <a:prstGeom prst="rect">
+            <a:avLst/>
+          </a:prstGeom>
+          <a:noFill/>
+          <a:ln/>
+        </p:spPr>
+        <p:txBody>
+          <a:bodyPr wrap="square" lIns="0" tIns="0" rIns="0" bIns="0" rtlCol="0" anchor="ctr"/>
+          <a:lstStyle/>
+          <a:p>
+            <a:pPr algn="ctr" indent="0" marL="0">
+              <a:buNone/>
+            </a:pPr>
+            <a:r>
+              <a:rPr lang="en-US" sz="1500" b="1" dirty="0">
+                <a:solidFill>
+                  <a:srgbClr val="FFFFFF"/>
+                </a:solidFill>
+                <a:latin typeface="Calibri" pitchFamily="34" charset="0"/>
+                <a:ea typeface="Calibri" pitchFamily="34" charset="-122"/>
+                <a:cs typeface="Calibri" pitchFamily="34" charset="-120"/>
+              </a:rPr>
+              <a:t>3</a:t>
+            </a:r>
+            <a:endParaRPr lang="en-US" sz="1500" dirty="0"/>
+          </a:p>
+        </p:txBody>
+      </p:sp>
+      <p:sp>
+        <p:nvSpPr>
+          <p:cNvPr id="14" name="Text 12"/>
+          <p:cNvSpPr/>
+          <p:nvPr/>
+        </p:nvSpPr>
+        <p:spPr>
+          <a:xfrm>
+            <a:off x="1508760" y="3867912"/>
+            <a:ext cx="9784080" cy="365760"/>
+          </a:xfrm>
+          <a:prstGeom prst="rect">
+            <a:avLst/>
+          </a:prstGeom>
+          <a:noFill/>
+          <a:ln/>
+        </p:spPr>
+        <p:txBody>
+          <a:bodyPr wrap="square" lIns="0" tIns="0" rIns="0" bIns="0" rtlCol="0" anchor="ctr"/>
+          <a:lstStyle/>
+          <a:p>
+            <a:pPr indent="0" marL="0">
+              <a:buNone/>
+            </a:pPr>
+            <a:r>
+              <a:rPr lang="en-US" sz="1800" b="1" dirty="0">
+                <a:solidFill>
+                  <a:srgbClr val="1B2430"/>
+                </a:solidFill>
+                <a:latin typeface="Calibri" pitchFamily="34" charset="0"/>
+                <a:ea typeface="Calibri" pitchFamily="34" charset="-122"/>
+                <a:cs typeface="Calibri" pitchFamily="34" charset="-120"/>
+              </a:rPr>
+              <a:t>Sayfalama bozulmaz</a:t>
+            </a:r>
+            <a:endParaRPr lang="en-US" sz="1800" dirty="0"/>
+          </a:p>
+        </p:txBody>
+      </p:sp>
+      <p:sp>
+        <p:nvSpPr>
           <p:cNvPr id="15" name="Text 13"/>
           <p:cNvSpPr/>
           <p:nvPr/>
         </p:nvSpPr>
         <p:spPr>
           <a:xfrm>
-            <a:off x="960120" y="3694176"/>
-            <a:ext cx="502920" cy="502920"/>
-          </a:xfrm>
-          <a:prstGeom prst="rect">
-            <a:avLst/>
-          </a:prstGeom>
-          <a:noFill/>
-          <a:ln/>
-        </p:spPr>
-        <p:txBody>
-          <a:bodyPr wrap="square" lIns="0" tIns="0" rIns="0" bIns="0" rtlCol="0" anchor="ctr"/>
-          <a:lstStyle/>
-          <a:p>
-            <a:pPr algn="ctr" indent="0" marL="0">
-              <a:buNone/>
-            </a:pPr>
-            <a:r>
-              <a:rPr lang="en-US" sz="1500" b="1" dirty="0">
-                <a:solidFill>
-                  <a:srgbClr val="FFFFFF"/>
-                </a:solidFill>
-                <a:latin typeface="Calibri" pitchFamily="34" charset="0"/>
-                <a:ea typeface="Calibri" pitchFamily="34" charset="-122"/>
-                <a:cs typeface="Calibri" pitchFamily="34" charset="-120"/>
-              </a:rPr>
-              <a:t>✓</a:t>
-            </a:r>
-            <a:endParaRPr lang="en-US" sz="1500" dirty="0"/>
-          </a:p>
-        </p:txBody>
-      </p:sp>
-      <p:sp>
-        <p:nvSpPr>
-          <p:cNvPr id="16" name="Text 14"/>
-          <p:cNvSpPr/>
-          <p:nvPr/>
-        </p:nvSpPr>
-        <p:spPr>
-          <a:xfrm>
-            <a:off x="1691640" y="3639312"/>
-            <a:ext cx="3657600" cy="548640"/>
-          </a:xfrm>
-          <a:prstGeom prst="rect">
-            <a:avLst/>
-          </a:prstGeom>
-          <a:noFill/>
-          <a:ln/>
-        </p:spPr>
-        <p:txBody>
-          <a:bodyPr wrap="square" lIns="0" tIns="0" rIns="0" bIns="0" rtlCol="0" anchor="ctr"/>
-          <a:lstStyle/>
-          <a:p>
-            <a:pPr indent="0" marL="0">
-              <a:buNone/>
-            </a:pPr>
-            <a:r>
-              <a:rPr lang="en-US" sz="1700" b="1" dirty="0">
-                <a:solidFill>
-                  <a:srgbClr val="1B2430"/>
-                </a:solidFill>
-                <a:latin typeface="Calibri" pitchFamily="34" charset="0"/>
-                <a:ea typeface="Calibri" pitchFamily="34" charset="-122"/>
-                <a:cs typeface="Calibri" pitchFamily="34" charset="-120"/>
-              </a:rPr>
-              <a:t>Arama muhendisligi</a:t>
-            </a:r>
-            <a:endParaRPr lang="en-US" sz="1700" dirty="0"/>
-          </a:p>
-        </p:txBody>
-      </p:sp>
-      <p:sp>
-        <p:nvSpPr>
-          <p:cNvPr id="17" name="Text 15"/>
-          <p:cNvSpPr/>
-          <p:nvPr/>
-        </p:nvSpPr>
-        <p:spPr>
-          <a:xfrm>
-            <a:off x="5394960" y="3639312"/>
-            <a:ext cx="5852160" cy="548640"/>
+            <a:off x="1508760" y="4233672"/>
+            <a:ext cx="9784080" cy="384048"/>
           </a:xfrm>
           <a:prstGeom prst="rect">
             <a:avLst/>
@@ -6180,7 +7490,7 @@
                 <a:ea typeface="Calibri" pitchFamily="34" charset="-122"/>
                 <a:cs typeface="Calibri" pitchFamily="34" charset="-120"/>
               </a:rPr>
-              <a:t>Solr indexleme, edismax sorgu ve facet sayimlari.</a:t>
+              <a:t>Filtre sunucu tarafinda; client-side olsaydi facet ve sayfalar bozulurdu.</a:t>
             </a:r>
             <a:endParaRPr lang="en-US" sz="1350" dirty="0"/>
           </a:p>
@@ -6188,36 +7498,14 @@
       </p:sp>
       <p:sp>
         <p:nvSpPr>
-          <p:cNvPr id="18" name="Shape 16"/>
-          <p:cNvSpPr/>
-          <p:nvPr/>
-        </p:nvSpPr>
-        <p:spPr>
-          <a:xfrm>
-            <a:off x="731520" y="4480560"/>
-            <a:ext cx="10698480" cy="841248"/>
-          </a:xfrm>
-          <a:prstGeom prst="roundRect">
-            <a:avLst>
-              <a:gd name="adj" fmla="val 10870"/>
-            </a:avLst>
-          </a:prstGeom>
-          <a:solidFill>
-            <a:srgbClr val="F4F8FB"/>
-          </a:solidFill>
-          <a:ln/>
-        </p:spPr>
-      </p:sp>
-      <p:sp>
-        <p:nvSpPr>
-          <p:cNvPr id="19" name="Shape 17"/>
-          <p:cNvSpPr/>
-          <p:nvPr/>
-        </p:nvSpPr>
-        <p:spPr>
-          <a:xfrm>
-            <a:off x="960120" y="4654296"/>
-            <a:ext cx="502920" cy="502920"/>
+          <p:cNvPr id="16" name="Shape 14"/>
+          <p:cNvSpPr/>
+          <p:nvPr/>
+        </p:nvSpPr>
+        <p:spPr>
+          <a:xfrm>
+            <a:off x="777240" y="4937760"/>
+            <a:ext cx="530352" cy="530352"/>
           </a:xfrm>
           <a:prstGeom prst="ellipse">
             <a:avLst/>
@@ -6230,14 +7518,14 @@
       </p:sp>
       <p:sp>
         <p:nvSpPr>
-          <p:cNvPr id="20" name="Text 18"/>
-          <p:cNvSpPr/>
-          <p:nvPr/>
-        </p:nvSpPr>
-        <p:spPr>
-          <a:xfrm>
-            <a:off x="960120" y="4654296"/>
-            <a:ext cx="502920" cy="502920"/>
+          <p:cNvPr id="17" name="Text 15"/>
+          <p:cNvSpPr/>
+          <p:nvPr/>
+        </p:nvSpPr>
+        <p:spPr>
+          <a:xfrm>
+            <a:off x="777240" y="4937760"/>
+            <a:ext cx="530352" cy="530352"/>
           </a:xfrm>
           <a:prstGeom prst="rect">
             <a:avLst/>
@@ -6261,7 +7549,7 @@
                 <a:ea typeface="Calibri" pitchFamily="34" charset="-122"/>
                 <a:cs typeface="Calibri" pitchFamily="34" charset="-120"/>
               </a:rPr>
-              <a:t>✓</a:t>
+              <a:t>4</a:t>
             </a:r>
             <a:endParaRPr lang="en-US" sz="1500" dirty="0"/>
           </a:p>
@@ -6269,30 +7557,30 @@
       </p:sp>
       <p:sp>
         <p:nvSpPr>
-          <p:cNvPr id="21" name="Text 19"/>
-          <p:cNvSpPr/>
-          <p:nvPr/>
-        </p:nvSpPr>
-        <p:spPr>
-          <a:xfrm>
-            <a:off x="1691640" y="4599432"/>
-            <a:ext cx="3657600" cy="548640"/>
-          </a:xfrm>
-          <a:prstGeom prst="rect">
-            <a:avLst/>
-          </a:prstGeom>
-          <a:noFill/>
-          <a:ln/>
-        </p:spPr>
-        <p:txBody>
-          <a:bodyPr wrap="square" lIns="0" tIns="0" rIns="0" bIns="0" rtlCol="0" anchor="ctr"/>
-          <a:lstStyle/>
-          <a:p>
-            <a:pPr indent="0" marL="0">
-              <a:buNone/>
-            </a:pPr>
-            <a:r>
-              <a:rPr lang="en-US" sz="1700" b="1" dirty="0">
+          <p:cNvPr id="18" name="Text 16"/>
+          <p:cNvSpPr/>
+          <p:nvPr/>
+        </p:nvSpPr>
+        <p:spPr>
+          <a:xfrm>
+            <a:off x="1508760" y="4919472"/>
+            <a:ext cx="9784080" cy="365760"/>
+          </a:xfrm>
+          <a:prstGeom prst="rect">
+            <a:avLst/>
+          </a:prstGeom>
+          <a:noFill/>
+          <a:ln/>
+        </p:spPr>
+        <p:txBody>
+          <a:bodyPr wrap="square" lIns="0" tIns="0" rIns="0" bIns="0" rtlCol="0" anchor="ctr"/>
+          <a:lstStyle/>
+          <a:p>
+            <a:pPr indent="0" marL="0">
+              <a:buNone/>
+            </a:pPr>
+            <a:r>
+              <a:rPr lang="en-US" sz="1800" b="1" dirty="0">
                 <a:solidFill>
                   <a:srgbClr val="1B2430"/>
                 </a:solidFill>
@@ -6300,22 +7588,22 @@
                 <a:ea typeface="Calibri" pitchFamily="34" charset="-122"/>
                 <a:cs typeface="Calibri" pitchFamily="34" charset="-120"/>
               </a:rPr>
-              <a:t>Modern on yuz</a:t>
-            </a:r>
-            <a:endParaRPr lang="en-US" sz="1700" dirty="0"/>
-          </a:p>
-        </p:txBody>
-      </p:sp>
-      <p:sp>
-        <p:nvSpPr>
-          <p:cNvPr id="22" name="Text 20"/>
-          <p:cNvSpPr/>
-          <p:nvPr/>
-        </p:nvSpPr>
-        <p:spPr>
-          <a:xfrm>
-            <a:off x="5394960" y="4599432"/>
-            <a:ext cx="5852160" cy="548640"/>
+              <a:t>Tutarli fiyat</a:t>
+            </a:r>
+            <a:endParaRPr lang="en-US" sz="1800" dirty="0"/>
+          </a:p>
+        </p:txBody>
+      </p:sp>
+      <p:sp>
+        <p:nvSpPr>
+          <p:cNvPr id="19" name="Text 17"/>
+          <p:cNvSpPr/>
+          <p:nvPr/>
+        </p:nvSpPr>
+        <p:spPr>
+          <a:xfrm>
+            <a:off x="1508760" y="5285232"/>
+            <a:ext cx="9784080" cy="384048"/>
           </a:xfrm>
           <a:prstGeom prst="rect">
             <a:avLst/>
@@ -6339,166 +7627,7 @@
                 <a:ea typeface="Calibri" pitchFamily="34" charset="-122"/>
                 <a:cs typeface="Calibri" pitchFamily="34" charset="-120"/>
               </a:rPr>
-              <a:t>Angular signals, reactive formlar, bilesin mimarisi.</a:t>
-            </a:r>
-            <a:endParaRPr lang="en-US" sz="1350" dirty="0"/>
-          </a:p>
-        </p:txBody>
-      </p:sp>
-      <p:sp>
-        <p:nvSpPr>
-          <p:cNvPr id="23" name="Shape 21"/>
-          <p:cNvSpPr/>
-          <p:nvPr/>
-        </p:nvSpPr>
-        <p:spPr>
-          <a:xfrm>
-            <a:off x="731520" y="5440680"/>
-            <a:ext cx="10698480" cy="841248"/>
-          </a:xfrm>
-          <a:prstGeom prst="roundRect">
-            <a:avLst>
-              <a:gd name="adj" fmla="val 10870"/>
-            </a:avLst>
-          </a:prstGeom>
-          <a:solidFill>
-            <a:srgbClr val="F4F8FB"/>
-          </a:solidFill>
-          <a:ln/>
-        </p:spPr>
-      </p:sp>
-      <p:sp>
-        <p:nvSpPr>
-          <p:cNvPr id="24" name="Shape 22"/>
-          <p:cNvSpPr/>
-          <p:nvPr/>
-        </p:nvSpPr>
-        <p:spPr>
-          <a:xfrm>
-            <a:off x="960120" y="5614416"/>
-            <a:ext cx="502920" cy="502920"/>
-          </a:xfrm>
-          <a:prstGeom prst="ellipse">
-            <a:avLst/>
-          </a:prstGeom>
-          <a:solidFill>
-            <a:srgbClr val="065A82"/>
-          </a:solidFill>
-          <a:ln/>
-        </p:spPr>
-      </p:sp>
-      <p:sp>
-        <p:nvSpPr>
-          <p:cNvPr id="25" name="Text 23"/>
-          <p:cNvSpPr/>
-          <p:nvPr/>
-        </p:nvSpPr>
-        <p:spPr>
-          <a:xfrm>
-            <a:off x="960120" y="5614416"/>
-            <a:ext cx="502920" cy="502920"/>
-          </a:xfrm>
-          <a:prstGeom prst="rect">
-            <a:avLst/>
-          </a:prstGeom>
-          <a:noFill/>
-          <a:ln/>
-        </p:spPr>
-        <p:txBody>
-          <a:bodyPr wrap="square" lIns="0" tIns="0" rIns="0" bIns="0" rtlCol="0" anchor="ctr"/>
-          <a:lstStyle/>
-          <a:p>
-            <a:pPr algn="ctr" indent="0" marL="0">
-              <a:buNone/>
-            </a:pPr>
-            <a:r>
-              <a:rPr lang="en-US" sz="1500" b="1" dirty="0">
-                <a:solidFill>
-                  <a:srgbClr val="FFFFFF"/>
-                </a:solidFill>
-                <a:latin typeface="Calibri" pitchFamily="34" charset="0"/>
-                <a:ea typeface="Calibri" pitchFamily="34" charset="-122"/>
-                <a:cs typeface="Calibri" pitchFamily="34" charset="-120"/>
-              </a:rPr>
-              <a:t>✓</a:t>
-            </a:r>
-            <a:endParaRPr lang="en-US" sz="1500" dirty="0"/>
-          </a:p>
-        </p:txBody>
-      </p:sp>
-      <p:sp>
-        <p:nvSpPr>
-          <p:cNvPr id="26" name="Text 24"/>
-          <p:cNvSpPr/>
-          <p:nvPr/>
-        </p:nvSpPr>
-        <p:spPr>
-          <a:xfrm>
-            <a:off x="1691640" y="5559552"/>
-            <a:ext cx="3657600" cy="548640"/>
-          </a:xfrm>
-          <a:prstGeom prst="rect">
-            <a:avLst/>
-          </a:prstGeom>
-          <a:noFill/>
-          <a:ln/>
-        </p:spPr>
-        <p:txBody>
-          <a:bodyPr wrap="square" lIns="0" tIns="0" rIns="0" bIns="0" rtlCol="0" anchor="ctr"/>
-          <a:lstStyle/>
-          <a:p>
-            <a:pPr indent="0" marL="0">
-              <a:buNone/>
-            </a:pPr>
-            <a:r>
-              <a:rPr lang="en-US" sz="1700" b="1" dirty="0">
-                <a:solidFill>
-                  <a:srgbClr val="1B2430"/>
-                </a:solidFill>
-                <a:latin typeface="Calibri" pitchFamily="34" charset="0"/>
-                <a:ea typeface="Calibri" pitchFamily="34" charset="-122"/>
-                <a:cs typeface="Calibri" pitchFamily="34" charset="-120"/>
-              </a:rPr>
-              <a:t>Deploy</a:t>
-            </a:r>
-            <a:endParaRPr lang="en-US" sz="1700" dirty="0"/>
-          </a:p>
-        </p:txBody>
-      </p:sp>
-      <p:sp>
-        <p:nvSpPr>
-          <p:cNvPr id="27" name="Text 25"/>
-          <p:cNvSpPr/>
-          <p:nvPr/>
-        </p:nvSpPr>
-        <p:spPr>
-          <a:xfrm>
-            <a:off x="5394960" y="5559552"/>
-            <a:ext cx="5852160" cy="548640"/>
-          </a:xfrm>
-          <a:prstGeom prst="rect">
-            <a:avLst/>
-          </a:prstGeom>
-          <a:noFill/>
-          <a:ln/>
-        </p:spPr>
-        <p:txBody>
-          <a:bodyPr wrap="square" lIns="0" tIns="0" rIns="0" bIns="0" rtlCol="0" anchor="ctr"/>
-          <a:lstStyle/>
-          <a:p>
-            <a:pPr indent="0" marL="0">
-              <a:buNone/>
-            </a:pPr>
-            <a:r>
-              <a:rPr lang="en-US" sz="1350" dirty="0">
-                <a:solidFill>
-                  <a:srgbClr val="5B6B7B"/>
-                </a:solidFill>
-                <a:latin typeface="Calibri" pitchFamily="34" charset="0"/>
-                <a:ea typeface="Calibri" pitchFamily="34" charset="-122"/>
-                <a:cs typeface="Calibri" pitchFamily="34" charset="-120"/>
-              </a:rPr>
-              <a:t>Vercel + Render + Docker ile canliya alma.</a:t>
+              <a:t>Karttaki fiyat = detaydaki en ucuz oda = rezervasyon fiyati.</a:t>
             </a:r>
             <a:endParaRPr lang="en-US" sz="1350" dirty="0"/>
           </a:p>
@@ -6544,8 +7673,8 @@
         </p:nvSpPr>
         <p:spPr>
           <a:xfrm>
-            <a:off x="8961120" y="3291840"/>
-            <a:ext cx="4572000" cy="4572000"/>
+            <a:off x="-1463040" y="4023360"/>
+            <a:ext cx="4206240" cy="4206240"/>
           </a:xfrm>
           <a:prstGeom prst="ellipse">
             <a:avLst/>
@@ -6564,66 +7693,24 @@
         </p:nvSpPr>
         <p:spPr>
           <a:xfrm>
-            <a:off x="822960" y="1280160"/>
-            <a:ext cx="7315200" cy="457200"/>
-          </a:xfrm>
-          <a:prstGeom prst="rect">
-            <a:avLst/>
-          </a:prstGeom>
-          <a:noFill/>
-          <a:ln/>
-        </p:spPr>
-        <p:txBody>
-          <a:bodyPr wrap="square" lIns="0" tIns="0" rIns="0" bIns="0" rtlCol="0" anchor="ctr"/>
-          <a:lstStyle/>
-          <a:p>
-            <a:pPr indent="0" marL="0">
-              <a:buNone/>
-            </a:pPr>
-            <a:r>
-              <a:rPr lang="en-US" sz="1500" b="1" spc="300" kern="0" dirty="0">
-                <a:solidFill>
-                  <a:srgbClr val="02C39A"/>
-                </a:solidFill>
-                <a:latin typeface="Calibri" pitchFamily="34" charset="0"/>
-                <a:ea typeface="Calibri" pitchFamily="34" charset="-122"/>
-                <a:cs typeface="Calibri" pitchFamily="34" charset="-120"/>
-              </a:rPr>
-              <a:t>Ozetle</a:t>
-            </a:r>
-            <a:endParaRPr lang="en-US" sz="1500" dirty="0"/>
-          </a:p>
-        </p:txBody>
-      </p:sp>
-      <p:sp>
-        <p:nvSpPr>
-          <p:cNvPr id="4" name="Text 2"/>
-          <p:cNvSpPr/>
-          <p:nvPr/>
-        </p:nvSpPr>
-        <p:spPr>
-          <a:xfrm>
-            <a:off x="777240" y="1783080"/>
-            <a:ext cx="9144000" cy="1554480"/>
-          </a:xfrm>
-          <a:prstGeom prst="rect">
-            <a:avLst/>
-          </a:prstGeom>
-          <a:noFill/>
-          <a:ln/>
-        </p:spPr>
-        <p:txBody>
-          <a:bodyPr wrap="square" lIns="0" tIns="0" rIns="0" bIns="0" rtlCol="0" anchor="ctr"/>
-          <a:lstStyle/>
-          <a:p>
-            <a:pPr indent="0" marL="0">
-              <a:lnSpc>
-                <a:spcPct val="105000"/>
-              </a:lnSpc>
-              <a:buNone/>
-            </a:pPr>
-            <a:r>
-              <a:rPr lang="en-US" sz="3800" b="1" dirty="0">
+            <a:off x="777240" y="640080"/>
+            <a:ext cx="10058400" cy="640080"/>
+          </a:xfrm>
+          <a:prstGeom prst="rect">
+            <a:avLst/>
+          </a:prstGeom>
+          <a:noFill/>
+          <a:ln/>
+        </p:spPr>
+        <p:txBody>
+          <a:bodyPr wrap="square" lIns="0" tIns="0" rIns="0" bIns="0" rtlCol="0" anchor="ctr"/>
+          <a:lstStyle/>
+          <a:p>
+            <a:pPr indent="0" marL="0">
+              <a:buNone/>
+            </a:pPr>
+            <a:r>
+              <a:rPr lang="en-US" sz="3400" b="1" dirty="0">
                 <a:solidFill>
                   <a:srgbClr val="FFFFFF"/>
                 </a:solidFill>
@@ -6631,61 +7718,97 @@
                 <a:ea typeface="Cambria" pitchFamily="34" charset="-122"/>
                 <a:cs typeface="Cambria" pitchFamily="34" charset="-120"/>
               </a:rPr>
-              <a:t>Uctan uca calisan,</a:t>
-            </a:r>
-            <a:endParaRPr lang="en-US" sz="3800" dirty="0"/>
-          </a:p>
-          <a:p>
-            <a:pPr indent="0" marL="0">
-              <a:lnSpc>
-                <a:spcPct val="105000"/>
-              </a:lnSpc>
-              <a:buNone/>
-            </a:pPr>
-            <a:r>
-              <a:rPr lang="en-US" sz="3800" b="1" dirty="0">
+              <a:t>Guvenlik ve dayaniklilik</a:t>
+            </a:r>
+            <a:endParaRPr lang="en-US" sz="3400" dirty="0"/>
+          </a:p>
+        </p:txBody>
+      </p:sp>
+      <p:sp>
+        <p:nvSpPr>
+          <p:cNvPr id="4" name="Shape 2"/>
+          <p:cNvSpPr/>
+          <p:nvPr/>
+        </p:nvSpPr>
+        <p:spPr>
+          <a:xfrm>
+            <a:off x="822960" y="1737360"/>
+            <a:ext cx="310896" cy="310896"/>
+          </a:xfrm>
+          <a:prstGeom prst="ellipse">
+            <a:avLst/>
+          </a:prstGeom>
+          <a:solidFill>
+            <a:srgbClr val="02C39A"/>
+          </a:solidFill>
+          <a:ln/>
+        </p:spPr>
+      </p:sp>
+      <p:sp>
+        <p:nvSpPr>
+          <p:cNvPr id="5" name="Text 3"/>
+          <p:cNvSpPr/>
+          <p:nvPr/>
+        </p:nvSpPr>
+        <p:spPr>
+          <a:xfrm>
+            <a:off x="1325880" y="1591056"/>
+            <a:ext cx="9875520" cy="365760"/>
+          </a:xfrm>
+          <a:prstGeom prst="rect">
+            <a:avLst/>
+          </a:prstGeom>
+          <a:noFill/>
+          <a:ln/>
+        </p:spPr>
+        <p:txBody>
+          <a:bodyPr wrap="square" lIns="0" tIns="0" rIns="0" bIns="0" rtlCol="0" anchor="ctr"/>
+          <a:lstStyle/>
+          <a:p>
+            <a:pPr indent="0" marL="0">
+              <a:buNone/>
+            </a:pPr>
+            <a:r>
+              <a:rPr lang="en-US" sz="1700" b="1" dirty="0">
                 <a:solidFill>
                   <a:srgbClr val="FFFFFF"/>
                 </a:solidFill>
-                <a:latin typeface="Cambria" pitchFamily="34" charset="0"/>
-                <a:ea typeface="Cambria" pitchFamily="34" charset="-122"/>
-                <a:cs typeface="Cambria" pitchFamily="34" charset="-120"/>
-              </a:rPr>
-              <a:t>gercek bir web uygulamasi.</a:t>
-            </a:r>
-            <a:endParaRPr lang="en-US" sz="3800" dirty="0"/>
-          </a:p>
-        </p:txBody>
-      </p:sp>
-      <p:sp>
-        <p:nvSpPr>
-          <p:cNvPr id="5" name="Text 3"/>
-          <p:cNvSpPr/>
-          <p:nvPr/>
-        </p:nvSpPr>
-        <p:spPr>
-          <a:xfrm>
-            <a:off x="822960" y="3657600"/>
-            <a:ext cx="8686800" cy="914400"/>
-          </a:xfrm>
-          <a:prstGeom prst="rect">
-            <a:avLst/>
-          </a:prstGeom>
-          <a:noFill/>
-          <a:ln/>
-        </p:spPr>
-        <p:txBody>
-          <a:bodyPr wrap="square" lIns="0" tIns="0" rIns="0" bIns="0" rtlCol="0" anchor="ctr"/>
-          <a:lstStyle/>
-          <a:p>
-            <a:pPr indent="0" marL="0">
-              <a:lnSpc>
-                <a:spcPct val="120000"/>
-              </a:lnSpc>
-              <a:buNone/>
-            </a:pPr>
-            <a:r>
-              <a:rPr lang="en-US" sz="1700" dirty="0">
+                <a:latin typeface="Calibri" pitchFamily="34" charset="0"/>
+                <a:ea typeface="Calibri" pitchFamily="34" charset="-122"/>
+                <a:cs typeface="Calibri" pitchFamily="34" charset="-120"/>
+              </a:rPr>
+              <a:t>BCrypt + stateless JWT</a:t>
+            </a:r>
+            <a:endParaRPr lang="en-US" sz="1700" dirty="0"/>
+          </a:p>
+        </p:txBody>
+      </p:sp>
+      <p:sp>
+        <p:nvSpPr>
+          <p:cNvPr id="6" name="Text 4"/>
+          <p:cNvSpPr/>
+          <p:nvPr/>
+        </p:nvSpPr>
+        <p:spPr>
+          <a:xfrm>
+            <a:off x="1325880" y="1938528"/>
+            <a:ext cx="9875520" cy="365760"/>
+          </a:xfrm>
+          <a:prstGeom prst="rect">
+            <a:avLst/>
+          </a:prstGeom>
+          <a:noFill/>
+          <a:ln/>
+        </p:spPr>
+        <p:txBody>
+          <a:bodyPr wrap="square" lIns="0" tIns="0" rIns="0" bIns="0" rtlCol="0" anchor="ctr"/>
+          <a:lstStyle/>
+          <a:p>
+            <a:pPr indent="0" marL="0">
+              <a:buNone/>
+            </a:pPr>
+            <a:r>
+              <a:rPr lang="en-US" sz="1350" dirty="0">
                 <a:solidFill>
                   <a:srgbClr val="CADCFC"/>
                 </a:solidFill>
@@ -6693,19 +7816,97 @@
                 <a:ea typeface="Calibri" pitchFamily="34" charset="-122"/>
                 <a:cs typeface="Calibri" pitchFamily="34" charset="-120"/>
               </a:rPr>
-              <a:t>On yuz + arka yuz + arama motoru + veritabani + guvenlik + deploy.</a:t>
+              <a:t>Sifreler hash'lenir, oturum sunucuda tutulmaz.</a:t>
+            </a:r>
+            <a:endParaRPr lang="en-US" sz="1350" dirty="0"/>
+          </a:p>
+        </p:txBody>
+      </p:sp>
+      <p:sp>
+        <p:nvSpPr>
+          <p:cNvPr id="7" name="Shape 5"/>
+          <p:cNvSpPr/>
+          <p:nvPr/>
+        </p:nvSpPr>
+        <p:spPr>
+          <a:xfrm>
+            <a:off x="822960" y="2788920"/>
+            <a:ext cx="310896" cy="310896"/>
+          </a:xfrm>
+          <a:prstGeom prst="ellipse">
+            <a:avLst/>
+          </a:prstGeom>
+          <a:solidFill>
+            <a:srgbClr val="02C39A"/>
+          </a:solidFill>
+          <a:ln/>
+        </p:spPr>
+      </p:sp>
+      <p:sp>
+        <p:nvSpPr>
+          <p:cNvPr id="8" name="Text 6"/>
+          <p:cNvSpPr/>
+          <p:nvPr/>
+        </p:nvSpPr>
+        <p:spPr>
+          <a:xfrm>
+            <a:off x="1325880" y="2642616"/>
+            <a:ext cx="9875520" cy="365760"/>
+          </a:xfrm>
+          <a:prstGeom prst="rect">
+            <a:avLst/>
+          </a:prstGeom>
+          <a:noFill/>
+          <a:ln/>
+        </p:spPr>
+        <p:txBody>
+          <a:bodyPr wrap="square" lIns="0" tIns="0" rIns="0" bIns="0" rtlCol="0" anchor="ctr"/>
+          <a:lstStyle/>
+          <a:p>
+            <a:pPr indent="0" marL="0">
+              <a:buNone/>
+            </a:pPr>
+            <a:r>
+              <a:rPr lang="en-US" sz="1700" b="1" dirty="0">
+                <a:solidFill>
+                  <a:srgbClr val="FFFFFF"/>
+                </a:solidFill>
+                <a:latin typeface="Calibri" pitchFamily="34" charset="0"/>
+                <a:ea typeface="Calibri" pitchFamily="34" charset="-122"/>
+                <a:cs typeface="Calibri" pitchFamily="34" charset="-120"/>
+              </a:rPr>
+              <a:t>E-posta normalize</a:t>
             </a:r>
             <a:endParaRPr lang="en-US" sz="1700" dirty="0"/>
           </a:p>
-          <a:p>
-            <a:pPr indent="0" marL="0">
-              <a:lnSpc>
-                <a:spcPct val="120000"/>
-              </a:lnSpc>
-              <a:buNone/>
-            </a:pPr>
-            <a:r>
-              <a:rPr lang="en-US" sz="1700" dirty="0">
+        </p:txBody>
+      </p:sp>
+      <p:sp>
+        <p:nvSpPr>
+          <p:cNvPr id="9" name="Text 7"/>
+          <p:cNvSpPr/>
+          <p:nvPr/>
+        </p:nvSpPr>
+        <p:spPr>
+          <a:xfrm>
+            <a:off x="1325880" y="2990088"/>
+            <a:ext cx="9875520" cy="365760"/>
+          </a:xfrm>
+          <a:prstGeom prst="rect">
+            <a:avLst/>
+          </a:prstGeom>
+          <a:noFill/>
+          <a:ln/>
+        </p:spPr>
+        <p:txBody>
+          <a:bodyPr wrap="square" lIns="0" tIns="0" rIns="0" bIns="0" rtlCol="0" anchor="ctr"/>
+          <a:lstStyle/>
+          <a:p>
+            <a:pPr indent="0" marL="0">
+              <a:buNone/>
+            </a:pPr>
+            <a:r>
+              <a:rPr lang="en-US" sz="1350" dirty="0">
                 <a:solidFill>
                   <a:srgbClr val="CADCFC"/>
                 </a:solidFill>
@@ -6713,7 +7914,66 @@
                 <a:ea typeface="Calibri" pitchFamily="34" charset="-122"/>
                 <a:cs typeface="Calibri" pitchFamily="34" charset="-120"/>
               </a:rPr>
-              <a:t>Hepsi tek projede birlesti.</a:t>
+              <a:t>Buyuk/kucuk harf farkiyla mukerrer hesap acilamaz.</a:t>
+            </a:r>
+            <a:endParaRPr lang="en-US" sz="1350" dirty="0"/>
+          </a:p>
+        </p:txBody>
+      </p:sp>
+      <p:sp>
+        <p:nvSpPr>
+          <p:cNvPr id="10" name="Shape 8"/>
+          <p:cNvSpPr/>
+          <p:nvPr/>
+        </p:nvSpPr>
+        <p:spPr>
+          <a:xfrm>
+            <a:off x="822960" y="3840480"/>
+            <a:ext cx="310896" cy="310896"/>
+          </a:xfrm>
+          <a:prstGeom prst="ellipse">
+            <a:avLst/>
+          </a:prstGeom>
+          <a:solidFill>
+            <a:srgbClr val="02C39A"/>
+          </a:solidFill>
+          <a:ln/>
+        </p:spPr>
+      </p:sp>
+      <p:sp>
+        <p:nvSpPr>
+          <p:cNvPr id="11" name="Text 9"/>
+          <p:cNvSpPr/>
+          <p:nvPr/>
+        </p:nvSpPr>
+        <p:spPr>
+          <a:xfrm>
+            <a:off x="1325880" y="3694176"/>
+            <a:ext cx="9875520" cy="365760"/>
+          </a:xfrm>
+          <a:prstGeom prst="rect">
+            <a:avLst/>
+          </a:prstGeom>
+          <a:noFill/>
+          <a:ln/>
+        </p:spPr>
+        <p:txBody>
+          <a:bodyPr wrap="square" lIns="0" tIns="0" rIns="0" bIns="0" rtlCol="0" anchor="ctr"/>
+          <a:lstStyle/>
+          <a:p>
+            <a:pPr indent="0" marL="0">
+              <a:buNone/>
+            </a:pPr>
+            <a:r>
+              <a:rPr lang="en-US" sz="1700" b="1" dirty="0">
+                <a:solidFill>
+                  <a:srgbClr val="FFFFFF"/>
+                </a:solidFill>
+                <a:latin typeface="Calibri" pitchFamily="34" charset="0"/>
+                <a:ea typeface="Calibri" pitchFamily="34" charset="-122"/>
+                <a:cs typeface="Calibri" pitchFamily="34" charset="-120"/>
+              </a:rPr>
+              <a:t>Sifre gucu + rol bazli yetki</a:t>
             </a:r>
             <a:endParaRPr lang="en-US" sz="1700" dirty="0"/>
           </a:p>
@@ -6721,30 +7981,89 @@
       </p:sp>
       <p:sp>
         <p:nvSpPr>
-          <p:cNvPr id="6" name="Text 4"/>
-          <p:cNvSpPr/>
-          <p:nvPr/>
-        </p:nvSpPr>
-        <p:spPr>
-          <a:xfrm>
-            <a:off x="822960" y="5212080"/>
-            <a:ext cx="8229600" cy="457200"/>
-          </a:xfrm>
-          <a:prstGeom prst="rect">
-            <a:avLst/>
-          </a:prstGeom>
-          <a:noFill/>
-          <a:ln/>
-        </p:spPr>
-        <p:txBody>
-          <a:bodyPr wrap="square" lIns="0" tIns="0" rIns="0" bIns="0" rtlCol="0" anchor="ctr"/>
-          <a:lstStyle/>
-          <a:p>
-            <a:pPr indent="0" marL="0">
-              <a:buNone/>
-            </a:pPr>
-            <a:r>
-              <a:rPr lang="en-US" sz="1800" b="1" dirty="0">
+          <p:cNvPr id="12" name="Text 10"/>
+          <p:cNvSpPr/>
+          <p:nvPr/>
+        </p:nvSpPr>
+        <p:spPr>
+          <a:xfrm>
+            <a:off x="1325880" y="4041648"/>
+            <a:ext cx="9875520" cy="365760"/>
+          </a:xfrm>
+          <a:prstGeom prst="rect">
+            <a:avLst/>
+          </a:prstGeom>
+          <a:noFill/>
+          <a:ln/>
+        </p:spPr>
+        <p:txBody>
+          <a:bodyPr wrap="square" lIns="0" tIns="0" rIns="0" bIns="0" rtlCol="0" anchor="ctr"/>
+          <a:lstStyle/>
+          <a:p>
+            <a:pPr indent="0" marL="0">
+              <a:buNone/>
+            </a:pPr>
+            <a:r>
+              <a:rPr lang="en-US" sz="1350" dirty="0">
+                <a:solidFill>
+                  <a:srgbClr val="CADCFC"/>
+                </a:solidFill>
+                <a:latin typeface="Calibri" pitchFamily="34" charset="0"/>
+                <a:ea typeface="Calibri" pitchFamily="34" charset="-122"/>
+                <a:cs typeface="Calibri" pitchFamily="34" charset="-120"/>
+              </a:rPr>
+              <a:t>En az 8 + harf + rakam; her uc nokta role gore korunur.</a:t>
+            </a:r>
+            <a:endParaRPr lang="en-US" sz="1350" dirty="0"/>
+          </a:p>
+        </p:txBody>
+      </p:sp>
+      <p:sp>
+        <p:nvSpPr>
+          <p:cNvPr id="13" name="Shape 11"/>
+          <p:cNvSpPr/>
+          <p:nvPr/>
+        </p:nvSpPr>
+        <p:spPr>
+          <a:xfrm>
+            <a:off x="822960" y="4892040"/>
+            <a:ext cx="310896" cy="310896"/>
+          </a:xfrm>
+          <a:prstGeom prst="ellipse">
+            <a:avLst/>
+          </a:prstGeom>
+          <a:solidFill>
+            <a:srgbClr val="02C39A"/>
+          </a:solidFill>
+          <a:ln/>
+        </p:spPr>
+      </p:sp>
+      <p:sp>
+        <p:nvSpPr>
+          <p:cNvPr id="14" name="Text 12"/>
+          <p:cNvSpPr/>
+          <p:nvPr/>
+        </p:nvSpPr>
+        <p:spPr>
+          <a:xfrm>
+            <a:off x="1325880" y="4745736"/>
+            <a:ext cx="9875520" cy="365760"/>
+          </a:xfrm>
+          <a:prstGeom prst="rect">
+            <a:avLst/>
+          </a:prstGeom>
+          <a:noFill/>
+          <a:ln/>
+        </p:spPr>
+        <p:txBody>
+          <a:bodyPr wrap="square" lIns="0" tIns="0" rIns="0" bIns="0" rtlCol="0" anchor="ctr"/>
+          <a:lstStyle/>
+          <a:p>
+            <a:pPr indent="0" marL="0">
+              <a:buNone/>
+            </a:pPr>
+            <a:r>
+              <a:rPr lang="en-US" sz="1700" b="1" dirty="0">
                 <a:solidFill>
                   <a:srgbClr val="FFFFFF"/>
                 </a:solidFill>
@@ -6752,9 +8071,48 @@
                 <a:ea typeface="Calibri" pitchFamily="34" charset="-122"/>
                 <a:cs typeface="Calibri" pitchFamily="34" charset="-120"/>
               </a:rPr>
-              <a:t>Tesekkurler  ·  Sorular?</a:t>
-            </a:r>
-            <a:endParaRPr lang="en-US" sz="1800" dirty="0"/>
+              <a:t>Kendi kendini onaran arama</a:t>
+            </a:r>
+            <a:endParaRPr lang="en-US" sz="1700" dirty="0"/>
+          </a:p>
+        </p:txBody>
+      </p:sp>
+      <p:sp>
+        <p:nvSpPr>
+          <p:cNvPr id="15" name="Text 13"/>
+          <p:cNvSpPr/>
+          <p:nvPr/>
+        </p:nvSpPr>
+        <p:spPr>
+          <a:xfrm>
+            <a:off x="1325880" y="5093208"/>
+            <a:ext cx="9875520" cy="365760"/>
+          </a:xfrm>
+          <a:prstGeom prst="rect">
+            <a:avLst/>
+          </a:prstGeom>
+          <a:noFill/>
+          <a:ln/>
+        </p:spPr>
+        <p:txBody>
+          <a:bodyPr wrap="square" lIns="0" tIns="0" rIns="0" bIns="0" rtlCol="0" anchor="ctr"/>
+          <a:lstStyle/>
+          <a:p>
+            <a:pPr indent="0" marL="0">
+              <a:buNone/>
+            </a:pPr>
+            <a:r>
+              <a:rPr lang="en-US" sz="1350" dirty="0">
+                <a:solidFill>
+                  <a:srgbClr val="CADCFC"/>
+                </a:solidFill>
+                <a:latin typeface="Calibri" pitchFamily="34" charset="0"/>
+                <a:ea typeface="Calibri" pitchFamily="34" charset="-122"/>
+                <a:cs typeface="Calibri" pitchFamily="34" charset="-120"/>
+              </a:rPr>
+              <a:t>Solr indeksi silinse bile backend veritabanindan otomatik yeniden kurar.</a:t>
+            </a:r>
+            <a:endParaRPr lang="en-US" sz="1350" dirty="0"/>
           </a:p>
         </p:txBody>
       </p:sp>
